--- a/docs/project-plan.pptx
+++ b/docs/project-plan.pptx
@@ -22,10 +22,9 @@
     <p:sldId id="270" r:id="rId16"/>
     <p:sldId id="271" r:id="rId17"/>
     <p:sldId id="272" r:id="rId18"/>
-    <p:sldId id="273" r:id="rId19"/>
   </p:sldIdLst>
   <p:notesMasterIdLst>
-    <p:notesMasterId r:id="rId20"/>
+    <p:notesMasterId r:id="rId19"/>
   </p:notesMasterIdLst>
   <p:sldSz cx="12192000" cy="6858000"/>
   <p:notesSz cx="6858000" cy="12192000"/>
@@ -124,19 +123,19 @@
   <p:extLst>
     <p:ext uri="{521415D9-36F7-43E2-AB2F-B90AF26B5E84}">
       <p14:sectionLst xmlns:p14="http://schemas.microsoft.com/office/powerpoint/2010/main">
-        <p14:section name="표지" id="{f0d5cc11-9595-df0e-0acc-a314783cd9fb}">
+        <p14:section name="표지" id="{35911808-bd6d-26c0-8f1e-b4a06ea0cc2a}">
           <p14:sldIdLst>
             <p14:sldId id="256"/>
           </p14:sldIdLst>
         </p14:section>
-        <p14:section name="기획" id="{79892c8d-5f12-5f7b-bda2-cde69d400805}">
+        <p14:section name="기획" id="{b0911caa-0348-4a10-0f13-0b936f838b10}">
           <p14:sldIdLst>
             <p14:sldId id="257"/>
             <p14:sldId id="258"/>
             <p14:sldId id="259"/>
           </p14:sldIdLst>
         </p14:section>
-        <p14:section name="기능 설계" id="{ab5f09c8-367d-63b2-0840-3dd27c9758c1}">
+        <p14:section name="기능 설계" id="{7a47bab8-63b9-822f-753f-558d01b678a7}">
           <p14:sldIdLst>
             <p14:sldId id="260"/>
             <p14:sldId id="261"/>
@@ -145,7 +144,7 @@
             <p14:sldId id="264"/>
           </p14:sldIdLst>
         </p14:section>
-        <p14:section name="구현 계획" id="{58cb7b5a-28e3-e217-4c40-5bb91287c893}">
+        <p14:section name="구현 계획" id="{ed4ba806-fef6-b8bc-a8ca-66fbed73834b}">
           <p14:sldIdLst>
             <p14:sldId id="265"/>
             <p14:sldId id="266"/>
@@ -153,17 +152,16 @@
             <p14:sldId id="268"/>
           </p14:sldIdLst>
         </p14:section>
-        <p14:section name="일정 · 관리" id="{7cafe765-3e06-5f03-aab0-a650571af3d7}">
+        <p14:section name="프로젝트 관리" id="{e1ddf648-9f05-cd0c-76ea-77e81d49fd5c}">
           <p14:sldIdLst>
             <p14:sldId id="269"/>
             <p14:sldId id="270"/>
             <p14:sldId id="271"/>
-            <p14:sldId id="272"/>
           </p14:sldIdLst>
         </p14:section>
-        <p14:section name="마무리" id="{3c0a04b1-5984-3121-a13a-ebfbd8127925}">
+        <p14:section name="마무리" id="{d0c33c13-224f-9eac-d33a-559224c7d4cf}">
           <p14:sldIdLst>
-            <p14:sldId id="273"/>
+            <p14:sldId id="272"/>
           </p14:sldIdLst>
         </p14:section>
       </p14:sectionLst>
@@ -1298,94 +1296,6 @@
             <a:fld id="{F7021451-1387-4CA6-816F-3879F97B5CBC}" type="slidenum">
               <a:rPr lang="en-US"/>
               <a:t>17</a:t>
-            </a:fld>
-            <a:endParaRPr lang="en-US"/>
-          </a:p>
-        </p:txBody>
-      </p:sp>
-    </p:spTree>
-    <p:extLst>
-      <p:ext uri="{BB962C8B-B14F-4D97-AF65-F5344CB8AC3E}">
-        <p14:creationId xmlns:p14="http://schemas.microsoft.com/office/powerpoint/2010/main" val="1024086991"/>
-      </p:ext>
-    </p:extLst>
-  </p:cSld>
-  <p:clrMapOvr>
-    <a:masterClrMapping/>
-  </p:clrMapOvr>
-</p:notes>
-</file>
-
-<file path=ppt/notesSlides/notesSlide18.xml><?xml version="1.0" encoding="utf-8"?>
-<p:notes xmlns:a="http://schemas.openxmlformats.org/drawingml/2006/main" xmlns:r="http://schemas.openxmlformats.org/officeDocument/2006/relationships" xmlns:p="http://schemas.openxmlformats.org/presentationml/2006/main">
-  <p:cSld>
-    <p:spTree>
-      <p:nvGrpSpPr>
-        <p:cNvPr id="1" name=""/>
-        <p:cNvGrpSpPr/>
-        <p:nvPr/>
-      </p:nvGrpSpPr>
-      <p:grpSpPr>
-        <a:xfrm>
-          <a:off x="0" y="0"/>
-          <a:ext cx="0" cy="0"/>
-          <a:chOff x="0" y="0"/>
-          <a:chExt cx="0" cy="0"/>
-        </a:xfrm>
-      </p:grpSpPr>
-      <p:sp>
-        <p:nvSpPr>
-          <p:cNvPr id="2" name="Slide Image Placeholder 1"/>
-          <p:cNvSpPr>
-            <a:spLocks noGrp="1" noRot="1" noChangeAspect="1"/>
-          </p:cNvSpPr>
-          <p:nvPr>
-            <p:ph type="sldImg"/>
-          </p:nvPr>
-        </p:nvSpPr>
-        <p:spPr/>
-      </p:sp>
-      <p:sp>
-        <p:nvSpPr>
-          <p:cNvPr id="3" name="Notes Placeholder 2"/>
-          <p:cNvSpPr>
-            <a:spLocks noGrp="1"/>
-          </p:cNvSpPr>
-          <p:nvPr>
-            <p:ph type="body" idx="1"/>
-          </p:nvPr>
-        </p:nvSpPr>
-        <p:spPr/>
-        <p:txBody>
-          <a:bodyPr/>
-          <a:lstStyle/>
-          <a:p>
-            <a:r>
-              <a:rPr lang="en-US" dirty="0"/>
-              <a:t/>
-            </a:r>
-            <a:endParaRPr lang="en-US" dirty="0"/>
-          </a:p>
-        </p:txBody>
-      </p:sp>
-      <p:sp>
-        <p:nvSpPr>
-          <p:cNvPr id="4" name="Slide Number Placeholder 3"/>
-          <p:cNvSpPr>
-            <a:spLocks noGrp="1"/>
-          </p:cNvSpPr>
-          <p:nvPr>
-            <p:ph type="sldNum" sz="quarter" idx="10"/>
-          </p:nvPr>
-        </p:nvSpPr>
-        <p:spPr/>
-        <p:txBody>
-          <a:bodyPr/>
-          <a:lstStyle/>
-          <a:p>
-            <a:fld id="{F7021451-1387-4CA6-816F-3879F97B5CBC}" type="slidenum">
-              <a:rPr lang="en-US"/>
-              <a:t>18</a:t>
             </a:fld>
             <a:endParaRPr lang="en-US"/>
           </a:p>
@@ -8667,7 +8577,7 @@
                   <a:schemeClr val="tx2"/>
                 </a:solidFill>
               </a:rPr>
-              <a:t>일정 및 마일스톤</a:t>
+              <a:t>GitHub 프로젝트 관리</a:t>
             </a:r>
             <a:endParaRPr lang="en-US" sz="3200" dirty="0"/>
           </a:p>
@@ -8703,7 +8613,7 @@
                   <a:schemeClr val="accent5"/>
                 </a:solidFill>
               </a:rPr>
-              <a:t>수업의 텀 프로젝트 일정을 GitHub 마일스톤으로 등록하고, 미팅마다 시연 가능한 버전을 만든다</a:t>
+              <a:t>저장소 하나에 Android Studio 프로젝트와 계획 문서를 모으고, 기능 단위 커밋으로 개발 과정을 남긴다</a:t>
             </a:r>
             <a:endParaRPr lang="en-US" sz="1600" dirty="0"/>
           </a:p>
@@ -8711,22 +8621,26 @@
       </p:sp>
       <p:sp>
         <p:nvSpPr>
-          <p:cNvPr id="4" name="timeline"/>
+          <p:cNvPr id="4" name="card-220"/>
           <p:cNvSpPr/>
           <p:nvPr/>
         </p:nvSpPr>
         <p:spPr>
           <a:xfrm>
-            <a:off x="1832572" y="2148840"/>
-            <a:ext cx="8526551" cy="0"/>
-          </a:xfrm>
-          <a:prstGeom prst="line">
-            <a:avLst/>
-          </a:prstGeom>
-          <a:noFill/>
-          <a:ln w="38100">
+            <a:off x="548640" y="1691640"/>
+            <a:ext cx="5410048" cy="2103120"/>
+          </a:xfrm>
+          <a:prstGeom prst="roundRect">
+            <a:avLst>
+              <a:gd name="adj" fmla="val 5217"/>
+            </a:avLst>
+          </a:prstGeom>
+          <a:solidFill>
+            <a:schemeClr val="bg2"/>
+          </a:solidFill>
+          <a:ln w="12700">
             <a:solidFill>
-              <a:srgbClr val="D9E6E4"/>
+              <a:schemeClr val="bg2"/>
             </a:solidFill>
             <a:prstDash val="solid"/>
           </a:ln>
@@ -8734,14 +8648,14 @@
       </p:sp>
       <p:sp>
         <p:nvSpPr>
-          <p:cNvPr id="5" name="dot-220"/>
+          <p:cNvPr id="5" name="dot-221"/>
           <p:cNvSpPr/>
           <p:nvPr/>
         </p:nvSpPr>
         <p:spPr>
           <a:xfrm>
-            <a:off x="1558252" y="1874520"/>
-            <a:ext cx="548640" cy="548640"/>
+            <a:off x="777240" y="1892808"/>
+            <a:ext cx="457200" cy="457200"/>
           </a:xfrm>
           <a:prstGeom prst="ellipse">
             <a:avLst/>
@@ -8759,14 +8673,14 @@
       </p:sp>
       <p:sp>
         <p:nvSpPr>
-          <p:cNvPr id="6" name="text-221"/>
+          <p:cNvPr id="6" name="text-222"/>
           <p:cNvSpPr txBox="1"/>
           <p:nvPr/>
         </p:nvSpPr>
         <p:spPr>
           <a:xfrm>
-            <a:off x="1558252" y="1874520"/>
-            <a:ext cx="548640" cy="548640"/>
+            <a:off x="777240" y="1892808"/>
+            <a:ext cx="457200" cy="457200"/>
           </a:xfrm>
           <a:prstGeom prst="rect">
             <a:avLst/>
@@ -8782,27 +8696,63 @@
               <a:buNone/>
             </a:pPr>
             <a:r>
-              <a:rPr lang="en-US" sz="1600" b="1" dirty="0">
+              <a:rPr lang="en-US" sz="1500" b="1" dirty="0">
                 <a:solidFill>
                   <a:schemeClr val="bg1"/>
                 </a:solidFill>
               </a:rPr>
               <a:t>1</a:t>
             </a:r>
-            <a:endParaRPr lang="en-US" sz="1600" dirty="0"/>
-          </a:p>
-        </p:txBody>
-      </p:sp>
-      <p:sp>
-        <p:nvSpPr>
-          <p:cNvPr id="7" name="text-222"/>
+            <a:endParaRPr lang="en-US" sz="1500" dirty="0"/>
+          </a:p>
+        </p:txBody>
+      </p:sp>
+      <p:sp>
+        <p:nvSpPr>
+          <p:cNvPr id="7" name="text-223"/>
           <p:cNvSpPr txBox="1"/>
           <p:nvPr/>
         </p:nvSpPr>
         <p:spPr>
           <a:xfrm>
-            <a:off x="548640" y="2606040"/>
-            <a:ext cx="2567864" cy="365760"/>
+            <a:off x="1417320" y="1892808"/>
+            <a:ext cx="4312768" cy="457200"/>
+          </a:xfrm>
+          <a:prstGeom prst="rect">
+            <a:avLst/>
+          </a:prstGeom>
+          <a:noFill/>
+          <a:ln/>
+        </p:spPr>
+        <p:txBody>
+          <a:bodyPr wrap="square" lIns="0" tIns="0" rIns="0" bIns="0" rtlCol="0" anchor="ctr"/>
+          <a:lstStyle/>
+          <a:p>
+            <a:pPr indent="0" marL="0">
+              <a:buNone/>
+            </a:pPr>
+            <a:r>
+              <a:rPr lang="en-US" sz="1700" b="1" dirty="0">
+                <a:solidFill>
+                  <a:schemeClr val="tx2"/>
+                </a:solidFill>
+              </a:rPr>
+              <a:t>저장소 구성</a:t>
+            </a:r>
+            <a:endParaRPr lang="en-US" sz="1700" dirty="0"/>
+          </a:p>
+        </p:txBody>
+      </p:sp>
+      <p:sp>
+        <p:nvSpPr>
+          <p:cNvPr id="8" name="text-224"/>
+          <p:cNvSpPr txBox="1"/>
+          <p:nvPr/>
+        </p:nvSpPr>
+        <p:spPr>
+          <a:xfrm>
+            <a:off x="822960" y="2514600"/>
+            <a:ext cx="4861408" cy="1188720"/>
           </a:xfrm>
           <a:prstGeom prst="rect">
             <a:avLst/>
@@ -8814,71 +8764,75 @@
           <a:bodyPr wrap="square" lIns="0" tIns="0" rIns="0" bIns="0" rtlCol="0" anchor="t"/>
           <a:lstStyle/>
           <a:p>
-            <a:pPr algn="ctr" indent="0" marL="0">
-              <a:buNone/>
-            </a:pPr>
-            <a:r>
-              <a:rPr lang="en-US" sz="1800" b="1" dirty="0">
-                <a:solidFill>
-                  <a:schemeClr val="tx2"/>
-                </a:solidFill>
-              </a:rPr>
-              <a:t>10월 11일</a:t>
-            </a:r>
-            <a:endParaRPr lang="en-US" sz="1800" dirty="0"/>
-          </a:p>
-        </p:txBody>
-      </p:sp>
-      <p:sp>
-        <p:nvSpPr>
-          <p:cNvPr id="8" name="text-223"/>
-          <p:cNvSpPr txBox="1"/>
-          <p:nvPr/>
-        </p:nvSpPr>
-        <p:spPr>
-          <a:xfrm>
-            <a:off x="548640" y="2971800"/>
-            <a:ext cx="2567864" cy="320040"/>
-          </a:xfrm>
-          <a:prstGeom prst="rect">
-            <a:avLst/>
-          </a:prstGeom>
-          <a:noFill/>
-          <a:ln/>
-        </p:spPr>
-        <p:txBody>
-          <a:bodyPr wrap="square" lIns="0" tIns="0" rIns="0" bIns="0" rtlCol="0" anchor="t"/>
-          <a:lstStyle/>
-          <a:p>
-            <a:pPr algn="ctr" indent="0" marL="0">
-              <a:buNone/>
+            <a:pPr marL="342900" indent="-342900">
+              <a:spcAft>
+                <a:spcPts val="400"/>
+              </a:spcAft>
+              <a:buSzPct val="100000"/>
+              <a:buChar char="•"/>
             </a:pPr>
             <a:r>
               <a:rPr lang="en-US" sz="1400" dirty="0">
                 <a:solidFill>
-                  <a:schemeClr val="accent5"/>
-                </a:solidFill>
-              </a:rPr>
-              <a:t>계획서 제출</a:t>
+                  <a:schemeClr val="tx1"/>
+                </a:solidFill>
+              </a:rPr>
+              <a:t>app/ : Android Studio 프로젝트 (Java)</a:t>
             </a:r>
             <a:endParaRPr lang="en-US" sz="1400" dirty="0"/>
           </a:p>
-        </p:txBody>
-      </p:sp>
-      <p:sp>
-        <p:nvSpPr>
-          <p:cNvPr id="9" name="card-224"/>
+          <a:p>
+            <a:pPr marL="342900" indent="-342900">
+              <a:spcAft>
+                <a:spcPts val="400"/>
+              </a:spcAft>
+              <a:buSzPct val="100000"/>
+              <a:buChar char="•"/>
+            </a:pPr>
+            <a:r>
+              <a:rPr lang="en-US" sz="1400" dirty="0">
+                <a:solidFill>
+                  <a:schemeClr val="tx1"/>
+                </a:solidFill>
+              </a:rPr>
+              <a:t>docs/ : 계획 문서와 그림</a:t>
+            </a:r>
+            <a:endParaRPr lang="en-US" sz="1400" dirty="0"/>
+          </a:p>
+          <a:p>
+            <a:pPr marL="342900" indent="-342900">
+              <a:spcAft>
+                <a:spcPts val="400"/>
+              </a:spcAft>
+              <a:buSzPct val="100000"/>
+              <a:buChar char="•"/>
+            </a:pPr>
+            <a:r>
+              <a:rPr lang="en-US" sz="1400" dirty="0">
+                <a:solidFill>
+                  <a:schemeClr val="tx1"/>
+                </a:solidFill>
+              </a:rPr>
+              <a:t>README : 프로젝트 소개와 실행 방법</a:t>
+            </a:r>
+            <a:endParaRPr lang="en-US" sz="1400" dirty="0"/>
+          </a:p>
+        </p:txBody>
+      </p:sp>
+      <p:sp>
+        <p:nvSpPr>
+          <p:cNvPr id="9" name="card-225"/>
           <p:cNvSpPr/>
           <p:nvPr/>
         </p:nvSpPr>
         <p:spPr>
           <a:xfrm>
-            <a:off x="548640" y="3474720"/>
-            <a:ext cx="2567864" cy="2697480"/>
+            <a:off x="6233008" y="1691640"/>
+            <a:ext cx="5410048" cy="2103120"/>
           </a:xfrm>
           <a:prstGeom prst="roundRect">
             <a:avLst>
-              <a:gd name="adj" fmla="val 4273"/>
+              <a:gd name="adj" fmla="val 5217"/>
             </a:avLst>
           </a:prstGeom>
           <a:solidFill>
@@ -8894,90 +8848,14 @@
       </p:sp>
       <p:sp>
         <p:nvSpPr>
-          <p:cNvPr id="10" name="text-225"/>
-          <p:cNvSpPr txBox="1"/>
-          <p:nvPr/>
-        </p:nvSpPr>
-        <p:spPr>
-          <a:xfrm>
-            <a:off x="731520" y="3611880"/>
-            <a:ext cx="2202104" cy="2103120"/>
-          </a:xfrm>
-          <a:prstGeom prst="rect">
-            <a:avLst/>
-          </a:prstGeom>
-          <a:noFill/>
-          <a:ln/>
-        </p:spPr>
-        <p:txBody>
-          <a:bodyPr wrap="square" lIns="0" tIns="0" rIns="0" bIns="0" rtlCol="0" anchor="t"/>
-          <a:lstStyle/>
-          <a:p>
-            <a:pPr marL="342900" indent="-342900">
-              <a:spcAft>
-                <a:spcPts val="600"/>
-              </a:spcAft>
-              <a:buSzPct val="100000"/>
-              <a:buChar char="•"/>
-            </a:pPr>
-            <a:r>
-              <a:rPr lang="en-US" sz="1400" dirty="0">
-                <a:solidFill>
-                  <a:schemeClr val="tx1"/>
-                </a:solidFill>
-              </a:rPr>
-              <a:t>기획·화면 설계</a:t>
-            </a:r>
-            <a:endParaRPr lang="en-US" sz="1400" dirty="0"/>
-          </a:p>
-          <a:p>
-            <a:pPr marL="342900" indent="-342900">
-              <a:spcAft>
-                <a:spcPts val="600"/>
-              </a:spcAft>
-              <a:buSzPct val="100000"/>
-              <a:buChar char="•"/>
-            </a:pPr>
-            <a:r>
-              <a:rPr lang="en-US" sz="1400" dirty="0">
-                <a:solidFill>
-                  <a:schemeClr val="tx1"/>
-                </a:solidFill>
-              </a:rPr>
-              <a:t>개발 계획 수립</a:t>
-            </a:r>
-            <a:endParaRPr lang="en-US" sz="1400" dirty="0"/>
-          </a:p>
-          <a:p>
-            <a:pPr marL="342900" indent="-342900">
-              <a:spcAft>
-                <a:spcPts val="600"/>
-              </a:spcAft>
-              <a:buSzPct val="100000"/>
-              <a:buChar char="•"/>
-            </a:pPr>
-            <a:r>
-              <a:rPr lang="en-US" sz="1400" dirty="0">
-                <a:solidFill>
-                  <a:schemeClr val="tx1"/>
-                </a:solidFill>
-              </a:rPr>
-              <a:t>1:1 미팅으로 계획 확인</a:t>
-            </a:r>
-            <a:endParaRPr lang="en-US" sz="1400" dirty="0"/>
-          </a:p>
-        </p:txBody>
-      </p:sp>
-      <p:sp>
-        <p:nvSpPr>
-          <p:cNvPr id="11" name="dot-226"/>
+          <p:cNvPr id="10" name="dot-226"/>
           <p:cNvSpPr/>
           <p:nvPr/>
         </p:nvSpPr>
         <p:spPr>
           <a:xfrm>
-            <a:off x="4400436" y="1874520"/>
-            <a:ext cx="548640" cy="548640"/>
+            <a:off x="6461608" y="1892808"/>
+            <a:ext cx="457200" cy="457200"/>
           </a:xfrm>
           <a:prstGeom prst="ellipse">
             <a:avLst/>
@@ -8995,14 +8873,14 @@
       </p:sp>
       <p:sp>
         <p:nvSpPr>
-          <p:cNvPr id="12" name="text-227"/>
+          <p:cNvPr id="11" name="text-227"/>
           <p:cNvSpPr txBox="1"/>
           <p:nvPr/>
         </p:nvSpPr>
         <p:spPr>
           <a:xfrm>
-            <a:off x="4400436" y="1874520"/>
-            <a:ext cx="548640" cy="548640"/>
+            <a:off x="6461608" y="1892808"/>
+            <a:ext cx="457200" cy="457200"/>
           </a:xfrm>
           <a:prstGeom prst="rect">
             <a:avLst/>
@@ -9018,27 +8896,63 @@
               <a:buNone/>
             </a:pPr>
             <a:r>
-              <a:rPr lang="en-US" sz="1600" b="1" dirty="0">
+              <a:rPr lang="en-US" sz="1500" b="1" dirty="0">
                 <a:solidFill>
                   <a:schemeClr val="bg1"/>
                 </a:solidFill>
               </a:rPr>
               <a:t>2</a:t>
             </a:r>
-            <a:endParaRPr lang="en-US" sz="1600" dirty="0"/>
-          </a:p>
-        </p:txBody>
-      </p:sp>
-      <p:sp>
-        <p:nvSpPr>
-          <p:cNvPr id="13" name="text-228"/>
+            <a:endParaRPr lang="en-US" sz="1500" dirty="0"/>
+          </a:p>
+        </p:txBody>
+      </p:sp>
+      <p:sp>
+        <p:nvSpPr>
+          <p:cNvPr id="12" name="text-228"/>
           <p:cNvSpPr txBox="1"/>
           <p:nvPr/>
         </p:nvSpPr>
         <p:spPr>
           <a:xfrm>
-            <a:off x="3390824" y="2606040"/>
-            <a:ext cx="2567864" cy="365760"/>
+            <a:off x="7101688" y="1892808"/>
+            <a:ext cx="4312768" cy="457200"/>
+          </a:xfrm>
+          <a:prstGeom prst="rect">
+            <a:avLst/>
+          </a:prstGeom>
+          <a:noFill/>
+          <a:ln/>
+        </p:spPr>
+        <p:txBody>
+          <a:bodyPr wrap="square" lIns="0" tIns="0" rIns="0" bIns="0" rtlCol="0" anchor="ctr"/>
+          <a:lstStyle/>
+          <a:p>
+            <a:pPr indent="0" marL="0">
+              <a:buNone/>
+            </a:pPr>
+            <a:r>
+              <a:rPr lang="en-US" sz="1700" b="1" dirty="0">
+                <a:solidFill>
+                  <a:schemeClr val="tx2"/>
+                </a:solidFill>
+              </a:rPr>
+              <a:t>계획 문서</a:t>
+            </a:r>
+            <a:endParaRPr lang="en-US" sz="1700" dirty="0"/>
+          </a:p>
+        </p:txBody>
+      </p:sp>
+      <p:sp>
+        <p:nvSpPr>
+          <p:cNvPr id="13" name="text-229"/>
+          <p:cNvSpPr txBox="1"/>
+          <p:nvPr/>
+        </p:nvSpPr>
+        <p:spPr>
+          <a:xfrm>
+            <a:off x="6507328" y="2514600"/>
+            <a:ext cx="4861408" cy="1188720"/>
           </a:xfrm>
           <a:prstGeom prst="rect">
             <a:avLst/>
@@ -9050,71 +8964,75 @@
           <a:bodyPr wrap="square" lIns="0" tIns="0" rIns="0" bIns="0" rtlCol="0" anchor="t"/>
           <a:lstStyle/>
           <a:p>
-            <a:pPr algn="ctr" indent="0" marL="0">
-              <a:buNone/>
-            </a:pPr>
-            <a:r>
-              <a:rPr lang="en-US" sz="1800" b="1" dirty="0">
-                <a:solidFill>
-                  <a:schemeClr val="tx2"/>
-                </a:solidFill>
-              </a:rPr>
-              <a:t>13주차</a:t>
-            </a:r>
-            <a:endParaRPr lang="en-US" sz="1800" dirty="0"/>
-          </a:p>
-        </p:txBody>
-      </p:sp>
-      <p:sp>
-        <p:nvSpPr>
-          <p:cNvPr id="14" name="text-229"/>
-          <p:cNvSpPr txBox="1"/>
-          <p:nvPr/>
-        </p:nvSpPr>
-        <p:spPr>
-          <a:xfrm>
-            <a:off x="3390824" y="2971800"/>
-            <a:ext cx="2567864" cy="320040"/>
-          </a:xfrm>
-          <a:prstGeom prst="rect">
-            <a:avLst/>
-          </a:prstGeom>
-          <a:noFill/>
-          <a:ln/>
-        </p:spPr>
-        <p:txBody>
-          <a:bodyPr wrap="square" lIns="0" tIns="0" rIns="0" bIns="0" rtlCol="0" anchor="t"/>
-          <a:lstStyle/>
-          <a:p>
-            <a:pPr algn="ctr" indent="0" marL="0">
-              <a:buNone/>
+            <a:pPr marL="342900" indent="-342900">
+              <a:spcAft>
+                <a:spcPts val="400"/>
+              </a:spcAft>
+              <a:buSzPct val="100000"/>
+              <a:buChar char="•"/>
             </a:pPr>
             <a:r>
               <a:rPr lang="en-US" sz="1400" dirty="0">
                 <a:solidFill>
-                  <a:schemeClr val="accent5"/>
-                </a:solidFill>
-              </a:rPr>
-              <a:t>Progress meeting #1</a:t>
+                  <a:schemeClr val="tx1"/>
+                </a:solidFill>
+              </a:rPr>
+              <a:t>project-plan.pptx : 프로젝트 계획서</a:t>
             </a:r>
             <a:endParaRPr lang="en-US" sz="1400" dirty="0"/>
           </a:p>
-        </p:txBody>
-      </p:sp>
-      <p:sp>
-        <p:nvSpPr>
-          <p:cNvPr id="15" name="card-230"/>
+          <a:p>
+            <a:pPr marL="342900" indent="-342900">
+              <a:spcAft>
+                <a:spcPts val="400"/>
+              </a:spcAft>
+              <a:buSzPct val="100000"/>
+              <a:buChar char="•"/>
+            </a:pPr>
+            <a:r>
+              <a:rPr lang="en-US" sz="1400" dirty="0">
+                <a:solidFill>
+                  <a:schemeClr val="tx1"/>
+                </a:solidFill>
+              </a:rPr>
+              <a:t>android-studio-plan.md : 개발 계획서</a:t>
+            </a:r>
+            <a:endParaRPr lang="en-US" sz="1400" dirty="0"/>
+          </a:p>
+          <a:p>
+            <a:pPr marL="342900" indent="-342900">
+              <a:spcAft>
+                <a:spcPts val="400"/>
+              </a:spcAft>
+              <a:buSzPct val="100000"/>
+              <a:buChar char="•"/>
+            </a:pPr>
+            <a:r>
+              <a:rPr lang="en-US" sz="1400" dirty="0">
+                <a:solidFill>
+                  <a:schemeClr val="tx1"/>
+                </a:solidFill>
+              </a:rPr>
+              <a:t>github-workflow.md · ai-usage.md : 관리 계획, AI 활용</a:t>
+            </a:r>
+            <a:endParaRPr lang="en-US" sz="1400" dirty="0"/>
+          </a:p>
+        </p:txBody>
+      </p:sp>
+      <p:sp>
+        <p:nvSpPr>
+          <p:cNvPr id="14" name="card-230"/>
           <p:cNvSpPr/>
           <p:nvPr/>
         </p:nvSpPr>
         <p:spPr>
           <a:xfrm>
-            <a:off x="3390824" y="3474720"/>
-            <a:ext cx="2567864" cy="2697480"/>
+            <a:off x="548640" y="4023360"/>
+            <a:ext cx="5410048" cy="2103120"/>
           </a:xfrm>
           <a:prstGeom prst="roundRect">
             <a:avLst>
-              <a:gd name="adj" fmla="val 4273"/>
+              <a:gd name="adj" fmla="val 5217"/>
             </a:avLst>
           </a:prstGeom>
           <a:solidFill>
@@ -9130,144 +9048,14 @@
       </p:sp>
       <p:sp>
         <p:nvSpPr>
-          <p:cNvPr id="16" name="text-231"/>
-          <p:cNvSpPr txBox="1"/>
-          <p:nvPr/>
-        </p:nvSpPr>
-        <p:spPr>
-          <a:xfrm>
-            <a:off x="3573704" y="3611880"/>
-            <a:ext cx="2202104" cy="320040"/>
-          </a:xfrm>
-          <a:prstGeom prst="rect">
-            <a:avLst/>
-          </a:prstGeom>
-          <a:noFill/>
-          <a:ln/>
-        </p:spPr>
-        <p:txBody>
-          <a:bodyPr wrap="square" lIns="0" tIns="0" rIns="0" bIns="0" rtlCol="0" anchor="t"/>
-          <a:lstStyle/>
-          <a:p>
-            <a:pPr indent="0" marL="0">
-              <a:buNone/>
-            </a:pPr>
-            <a:r>
-              <a:rPr lang="en-US" sz="1300" b="1" dirty="0">
-                <a:solidFill>
-                  <a:schemeClr val="accent3"/>
-                </a:solidFill>
-              </a:rPr>
-              <a:t>Release v0.1</a:t>
-            </a:r>
-            <a:endParaRPr lang="en-US" sz="1300" dirty="0"/>
-          </a:p>
-        </p:txBody>
-      </p:sp>
-      <p:sp>
-        <p:nvSpPr>
-          <p:cNvPr id="17" name="text-232"/>
-          <p:cNvSpPr txBox="1"/>
-          <p:nvPr/>
-        </p:nvSpPr>
-        <p:spPr>
-          <a:xfrm>
-            <a:off x="3573704" y="3977640"/>
-            <a:ext cx="2202104" cy="2103120"/>
-          </a:xfrm>
-          <a:prstGeom prst="rect">
-            <a:avLst/>
-          </a:prstGeom>
-          <a:noFill/>
-          <a:ln/>
-        </p:spPr>
-        <p:txBody>
-          <a:bodyPr wrap="square" lIns="0" tIns="0" rIns="0" bIns="0" rtlCol="0" anchor="t"/>
-          <a:lstStyle/>
-          <a:p>
-            <a:pPr marL="342900" indent="-342900">
-              <a:spcAft>
-                <a:spcPts val="600"/>
-              </a:spcAft>
-              <a:buSzPct val="100000"/>
-              <a:buChar char="•"/>
-            </a:pPr>
-            <a:r>
-              <a:rPr lang="en-US" sz="1400" dirty="0">
-                <a:solidFill>
-                  <a:schemeClr val="tx1"/>
-                </a:solidFill>
-              </a:rPr>
-              <a:t>프로젝트 준비</a:t>
-            </a:r>
-            <a:endParaRPr lang="en-US" sz="1400" dirty="0"/>
-          </a:p>
-          <a:p>
-            <a:pPr marL="342900" indent="-342900">
-              <a:spcAft>
-                <a:spcPts val="600"/>
-              </a:spcAft>
-              <a:buSzPct val="100000"/>
-              <a:buChar char="•"/>
-            </a:pPr>
-            <a:r>
-              <a:rPr lang="en-US" sz="1400" dirty="0">
-                <a:solidFill>
-                  <a:schemeClr val="tx1"/>
-                </a:solidFill>
-              </a:rPr>
-              <a:t>촬영 · 글자 인식</a:t>
-            </a:r>
-            <a:endParaRPr lang="en-US" sz="1400" dirty="0"/>
-          </a:p>
-          <a:p>
-            <a:pPr marL="342900" indent="-342900">
-              <a:spcAft>
-                <a:spcPts val="600"/>
-              </a:spcAft>
-              <a:buSzPct val="100000"/>
-              <a:buChar char="•"/>
-            </a:pPr>
-            <a:r>
-              <a:rPr lang="en-US" sz="1400" dirty="0">
-                <a:solidFill>
-                  <a:schemeClr val="tx1"/>
-                </a:solidFill>
-              </a:rPr>
-              <a:t>개인정보 가림</a:t>
-            </a:r>
-            <a:endParaRPr lang="en-US" sz="1400" dirty="0"/>
-          </a:p>
-          <a:p>
-            <a:pPr marL="342900" indent="-342900">
-              <a:spcAft>
-                <a:spcPts val="600"/>
-              </a:spcAft>
-              <a:buSzPct val="100000"/>
-              <a:buChar char="•"/>
-            </a:pPr>
-            <a:r>
-              <a:rPr lang="en-US" sz="1400" dirty="0">
-                <a:solidFill>
-                  <a:schemeClr val="tx1"/>
-                </a:solidFill>
-              </a:rPr>
-              <a:t>세 줄 요약 화면</a:t>
-            </a:r>
-            <a:endParaRPr lang="en-US" sz="1400" dirty="0"/>
-          </a:p>
-        </p:txBody>
-      </p:sp>
-      <p:sp>
-        <p:nvSpPr>
-          <p:cNvPr id="18" name="dot-233"/>
+          <p:cNvPr id="15" name="dot-231"/>
           <p:cNvSpPr/>
           <p:nvPr/>
         </p:nvSpPr>
         <p:spPr>
           <a:xfrm>
-            <a:off x="7242620" y="1874520"/>
-            <a:ext cx="548640" cy="548640"/>
+            <a:off x="777240" y="4224528"/>
+            <a:ext cx="457200" cy="457200"/>
           </a:xfrm>
           <a:prstGeom prst="ellipse">
             <a:avLst/>
@@ -9285,14 +9073,14 @@
       </p:sp>
       <p:sp>
         <p:nvSpPr>
-          <p:cNvPr id="19" name="text-234"/>
+          <p:cNvPr id="16" name="text-232"/>
           <p:cNvSpPr txBox="1"/>
           <p:nvPr/>
         </p:nvSpPr>
         <p:spPr>
           <a:xfrm>
-            <a:off x="7242620" y="1874520"/>
-            <a:ext cx="548640" cy="548640"/>
+            <a:off x="777240" y="4224528"/>
+            <a:ext cx="457200" cy="457200"/>
           </a:xfrm>
           <a:prstGeom prst="rect">
             <a:avLst/>
@@ -9308,27 +9096,63 @@
               <a:buNone/>
             </a:pPr>
             <a:r>
-              <a:rPr lang="en-US" sz="1600" b="1" dirty="0">
+              <a:rPr lang="en-US" sz="1500" b="1" dirty="0">
                 <a:solidFill>
                   <a:schemeClr val="bg1"/>
                 </a:solidFill>
               </a:rPr>
               <a:t>3</a:t>
             </a:r>
-            <a:endParaRPr lang="en-US" sz="1600" dirty="0"/>
-          </a:p>
-        </p:txBody>
-      </p:sp>
-      <p:sp>
-        <p:nvSpPr>
-          <p:cNvPr id="20" name="text-235"/>
+            <a:endParaRPr lang="en-US" sz="1500" dirty="0"/>
+          </a:p>
+        </p:txBody>
+      </p:sp>
+      <p:sp>
+        <p:nvSpPr>
+          <p:cNvPr id="17" name="text-233"/>
           <p:cNvSpPr txBox="1"/>
           <p:nvPr/>
         </p:nvSpPr>
         <p:spPr>
           <a:xfrm>
-            <a:off x="6233008" y="2606040"/>
-            <a:ext cx="2567864" cy="365760"/>
+            <a:off x="1417320" y="4224528"/>
+            <a:ext cx="4312768" cy="457200"/>
+          </a:xfrm>
+          <a:prstGeom prst="rect">
+            <a:avLst/>
+          </a:prstGeom>
+          <a:noFill/>
+          <a:ln/>
+        </p:spPr>
+        <p:txBody>
+          <a:bodyPr wrap="square" lIns="0" tIns="0" rIns="0" bIns="0" rtlCol="0" anchor="ctr"/>
+          <a:lstStyle/>
+          <a:p>
+            <a:pPr indent="0" marL="0">
+              <a:buNone/>
+            </a:pPr>
+            <a:r>
+              <a:rPr lang="en-US" sz="1700" b="1" dirty="0">
+                <a:solidFill>
+                  <a:schemeClr val="tx2"/>
+                </a:solidFill>
+              </a:rPr>
+              <a:t>커밋 규칙</a:t>
+            </a:r>
+            <a:endParaRPr lang="en-US" sz="1700" dirty="0"/>
+          </a:p>
+        </p:txBody>
+      </p:sp>
+      <p:sp>
+        <p:nvSpPr>
+          <p:cNvPr id="18" name="text-234"/>
+          <p:cNvSpPr txBox="1"/>
+          <p:nvPr/>
+        </p:nvSpPr>
+        <p:spPr>
+          <a:xfrm>
+            <a:off x="822960" y="4846320"/>
+            <a:ext cx="4861408" cy="1188720"/>
           </a:xfrm>
           <a:prstGeom prst="rect">
             <a:avLst/>
@@ -9340,71 +9164,75 @@
           <a:bodyPr wrap="square" lIns="0" tIns="0" rIns="0" bIns="0" rtlCol="0" anchor="t"/>
           <a:lstStyle/>
           <a:p>
-            <a:pPr algn="ctr" indent="0" marL="0">
-              <a:buNone/>
-            </a:pPr>
-            <a:r>
-              <a:rPr lang="en-US" sz="1800" b="1" dirty="0">
-                <a:solidFill>
-                  <a:schemeClr val="tx2"/>
-                </a:solidFill>
-              </a:rPr>
-              <a:t>14주차</a:t>
-            </a:r>
-            <a:endParaRPr lang="en-US" sz="1800" dirty="0"/>
-          </a:p>
-        </p:txBody>
-      </p:sp>
-      <p:sp>
-        <p:nvSpPr>
-          <p:cNvPr id="21" name="text-236"/>
-          <p:cNvSpPr txBox="1"/>
-          <p:nvPr/>
-        </p:nvSpPr>
-        <p:spPr>
-          <a:xfrm>
-            <a:off x="6233008" y="2971800"/>
-            <a:ext cx="2567864" cy="320040"/>
-          </a:xfrm>
-          <a:prstGeom prst="rect">
-            <a:avLst/>
-          </a:prstGeom>
-          <a:noFill/>
-          <a:ln/>
-        </p:spPr>
-        <p:txBody>
-          <a:bodyPr wrap="square" lIns="0" tIns="0" rIns="0" bIns="0" rtlCol="0" anchor="t"/>
-          <a:lstStyle/>
-          <a:p>
-            <a:pPr algn="ctr" indent="0" marL="0">
-              <a:buNone/>
+            <a:pPr marL="342900" indent="-342900">
+              <a:spcAft>
+                <a:spcPts val="400"/>
+              </a:spcAft>
+              <a:buSzPct val="100000"/>
+              <a:buChar char="•"/>
             </a:pPr>
             <a:r>
               <a:rPr lang="en-US" sz="1400" dirty="0">
                 <a:solidFill>
-                  <a:schemeClr val="accent5"/>
-                </a:solidFill>
-              </a:rPr>
-              <a:t>Progress meeting #2</a:t>
+                  <a:schemeClr val="tx1"/>
+                </a:solidFill>
+              </a:rPr>
+              <a:t>1인 프로젝트로 main 브랜치 하나 운영</a:t>
             </a:r>
             <a:endParaRPr lang="en-US" sz="1400" dirty="0"/>
           </a:p>
-        </p:txBody>
-      </p:sp>
-      <p:sp>
-        <p:nvSpPr>
-          <p:cNvPr id="22" name="card-237"/>
+          <a:p>
+            <a:pPr marL="342900" indent="-342900">
+              <a:spcAft>
+                <a:spcPts val="400"/>
+              </a:spcAft>
+              <a:buSzPct val="100000"/>
+              <a:buChar char="•"/>
+            </a:pPr>
+            <a:r>
+              <a:rPr lang="en-US" sz="1400" dirty="0">
+                <a:solidFill>
+                  <a:schemeClr val="tx1"/>
+                </a:solidFill>
+              </a:rPr>
+              <a:t>기능 하나가 동작하는 단위로 커밋</a:t>
+            </a:r>
+            <a:endParaRPr lang="en-US" sz="1400" dirty="0"/>
+          </a:p>
+          <a:p>
+            <a:pPr marL="342900" indent="-342900">
+              <a:spcAft>
+                <a:spcPts val="400"/>
+              </a:spcAft>
+              <a:buSzPct val="100000"/>
+              <a:buChar char="•"/>
+            </a:pPr>
+            <a:r>
+              <a:rPr lang="en-US" sz="1400" dirty="0">
+                <a:solidFill>
+                  <a:schemeClr val="tx1"/>
+                </a:solidFill>
+              </a:rPr>
+              <a:t>메시지 예: 촬영 안내 화면과 가이드 틀 추가</a:t>
+            </a:r>
+            <a:endParaRPr lang="en-US" sz="1400" dirty="0"/>
+          </a:p>
+        </p:txBody>
+      </p:sp>
+      <p:sp>
+        <p:nvSpPr>
+          <p:cNvPr id="19" name="card-235"/>
           <p:cNvSpPr/>
           <p:nvPr/>
         </p:nvSpPr>
         <p:spPr>
           <a:xfrm>
-            <a:off x="6233008" y="3474720"/>
-            <a:ext cx="2567864" cy="2697480"/>
+            <a:off x="6233008" y="4023360"/>
+            <a:ext cx="5410048" cy="2103120"/>
           </a:xfrm>
           <a:prstGeom prst="roundRect">
             <a:avLst>
-              <a:gd name="adj" fmla="val 4273"/>
+              <a:gd name="adj" fmla="val 5217"/>
             </a:avLst>
           </a:prstGeom>
           <a:solidFill>
@@ -9420,50 +9248,111 @@
       </p:sp>
       <p:sp>
         <p:nvSpPr>
-          <p:cNvPr id="23" name="text-238"/>
+          <p:cNvPr id="20" name="dot-236"/>
+          <p:cNvSpPr/>
+          <p:nvPr/>
+        </p:nvSpPr>
+        <p:spPr>
+          <a:xfrm>
+            <a:off x="6461608" y="4224528"/>
+            <a:ext cx="457200" cy="457200"/>
+          </a:xfrm>
+          <a:prstGeom prst="ellipse">
+            <a:avLst/>
+          </a:prstGeom>
+          <a:solidFill>
+            <a:schemeClr val="accent1"/>
+          </a:solidFill>
+          <a:ln w="12700">
+            <a:solidFill>
+              <a:schemeClr val="accent1"/>
+            </a:solidFill>
+            <a:prstDash val="solid"/>
+          </a:ln>
+        </p:spPr>
+      </p:sp>
+      <p:sp>
+        <p:nvSpPr>
+          <p:cNvPr id="21" name="text-237"/>
           <p:cNvSpPr txBox="1"/>
           <p:nvPr/>
         </p:nvSpPr>
         <p:spPr>
           <a:xfrm>
-            <a:off x="6415888" y="3611880"/>
-            <a:ext cx="2202104" cy="320040"/>
-          </a:xfrm>
-          <a:prstGeom prst="rect">
-            <a:avLst/>
-          </a:prstGeom>
-          <a:noFill/>
-          <a:ln/>
-        </p:spPr>
-        <p:txBody>
-          <a:bodyPr wrap="square" lIns="0" tIns="0" rIns="0" bIns="0" rtlCol="0" anchor="t"/>
+            <a:off x="6461608" y="4224528"/>
+            <a:ext cx="457200" cy="457200"/>
+          </a:xfrm>
+          <a:prstGeom prst="rect">
+            <a:avLst/>
+          </a:prstGeom>
+          <a:noFill/>
+          <a:ln/>
+        </p:spPr>
+        <p:txBody>
+          <a:bodyPr wrap="square" lIns="0" tIns="0" rIns="0" bIns="0" rtlCol="0" anchor="ctr"/>
+          <a:lstStyle/>
+          <a:p>
+            <a:pPr algn="ctr" indent="0" marL="0">
+              <a:buNone/>
+            </a:pPr>
+            <a:r>
+              <a:rPr lang="en-US" sz="1500" b="1" dirty="0">
+                <a:solidFill>
+                  <a:schemeClr val="bg1"/>
+                </a:solidFill>
+              </a:rPr>
+              <a:t>4</a:t>
+            </a:r>
+            <a:endParaRPr lang="en-US" sz="1500" dirty="0"/>
+          </a:p>
+        </p:txBody>
+      </p:sp>
+      <p:sp>
+        <p:nvSpPr>
+          <p:cNvPr id="22" name="text-238"/>
+          <p:cNvSpPr txBox="1"/>
+          <p:nvPr/>
+        </p:nvSpPr>
+        <p:spPr>
+          <a:xfrm>
+            <a:off x="7101688" y="4224528"/>
+            <a:ext cx="4312768" cy="457200"/>
+          </a:xfrm>
+          <a:prstGeom prst="rect">
+            <a:avLst/>
+          </a:prstGeom>
+          <a:noFill/>
+          <a:ln/>
+        </p:spPr>
+        <p:txBody>
+          <a:bodyPr wrap="square" lIns="0" tIns="0" rIns="0" bIns="0" rtlCol="0" anchor="ctr"/>
           <a:lstStyle/>
           <a:p>
             <a:pPr indent="0" marL="0">
               <a:buNone/>
             </a:pPr>
             <a:r>
-              <a:rPr lang="en-US" sz="1300" b="1" dirty="0">
-                <a:solidFill>
-                  <a:schemeClr val="accent3"/>
-                </a:solidFill>
-              </a:rPr>
-              <a:t>Release v0.2</a:t>
-            </a:r>
-            <a:endParaRPr lang="en-US" sz="1300" dirty="0"/>
-          </a:p>
-        </p:txBody>
-      </p:sp>
-      <p:sp>
-        <p:nvSpPr>
-          <p:cNvPr id="24" name="text-239"/>
+              <a:rPr lang="en-US" sz="1700" b="1" dirty="0">
+                <a:solidFill>
+                  <a:schemeClr val="tx2"/>
+                </a:solidFill>
+              </a:rPr>
+              <a:t>올리지 않는 파일</a:t>
+            </a:r>
+            <a:endParaRPr lang="en-US" sz="1700" dirty="0"/>
+          </a:p>
+        </p:txBody>
+      </p:sp>
+      <p:sp>
+        <p:nvSpPr>
+          <p:cNvPr id="23" name="text-239"/>
           <p:cNvSpPr txBox="1"/>
           <p:nvPr/>
         </p:nvSpPr>
         <p:spPr>
           <a:xfrm>
-            <a:off x="6415888" y="3977640"/>
-            <a:ext cx="2202104" cy="2103120"/>
+            <a:off x="6507328" y="4846320"/>
+            <a:ext cx="4861408" cy="1188720"/>
           </a:xfrm>
           <a:prstGeom prst="rect">
             <a:avLst/>
@@ -9477,7 +9366,7 @@
           <a:p>
             <a:pPr marL="342900" indent="-342900">
               <a:spcAft>
-                <a:spcPts val="600"/>
+                <a:spcPts val="400"/>
               </a:spcAft>
               <a:buSzPct val="100000"/>
               <a:buChar char="•"/>
@@ -9488,14 +9377,14 @@
                   <a:schemeClr val="tx1"/>
                 </a:solidFill>
               </a:rPr>
-              <a:t>날짜·금액 대조</a:t>
+              <a:t>local.properties (Gemini API 키)</a:t>
             </a:r>
             <a:endParaRPr lang="en-US" sz="1400" dirty="0"/>
           </a:p>
           <a:p>
             <a:pPr marL="342900" indent="-342900">
               <a:spcAft>
-                <a:spcPts val="600"/>
+                <a:spcPts val="400"/>
               </a:spcAft>
               <a:buSzPct val="100000"/>
               <a:buChar char="•"/>
@@ -9506,14 +9395,14 @@
                   <a:schemeClr val="tx1"/>
                 </a:solidFill>
               </a:rPr>
-              <a:t>Room 저장과 목록</a:t>
+              <a:t>google-services.json, 서명 키 (*.jks)</a:t>
             </a:r>
             <a:endParaRPr lang="en-US" sz="1400" dirty="0"/>
           </a:p>
           <a:p>
             <a:pPr marL="342900" indent="-342900">
               <a:spcAft>
-                <a:spcPts val="600"/>
+                <a:spcPts val="400"/>
               </a:spcAft>
               <a:buSzPct val="100000"/>
               <a:buChar char="•"/>
@@ -9524,279 +9413,7 @@
                   <a:schemeClr val="tx1"/>
                 </a:solidFill>
               </a:rPr>
-              <a:t>행동 연결 · 알림</a:t>
-            </a:r>
-            <a:endParaRPr lang="en-US" sz="1400" dirty="0"/>
-          </a:p>
-        </p:txBody>
-      </p:sp>
-      <p:sp>
-        <p:nvSpPr>
-          <p:cNvPr id="25" name="dot-240"/>
-          <p:cNvSpPr/>
-          <p:nvPr/>
-        </p:nvSpPr>
-        <p:spPr>
-          <a:xfrm>
-            <a:off x="10084803" y="1874520"/>
-            <a:ext cx="548640" cy="548640"/>
-          </a:xfrm>
-          <a:prstGeom prst="ellipse">
-            <a:avLst/>
-          </a:prstGeom>
-          <a:solidFill>
-            <a:schemeClr val="accent2"/>
-          </a:solidFill>
-          <a:ln w="12700">
-            <a:solidFill>
-              <a:schemeClr val="accent2"/>
-            </a:solidFill>
-            <a:prstDash val="solid"/>
-          </a:ln>
-        </p:spPr>
-      </p:sp>
-      <p:sp>
-        <p:nvSpPr>
-          <p:cNvPr id="26" name="text-241"/>
-          <p:cNvSpPr txBox="1"/>
-          <p:nvPr/>
-        </p:nvSpPr>
-        <p:spPr>
-          <a:xfrm>
-            <a:off x="10084803" y="1874520"/>
-            <a:ext cx="548640" cy="548640"/>
-          </a:xfrm>
-          <a:prstGeom prst="rect">
-            <a:avLst/>
-          </a:prstGeom>
-          <a:noFill/>
-          <a:ln/>
-        </p:spPr>
-        <p:txBody>
-          <a:bodyPr wrap="square" lIns="0" tIns="0" rIns="0" bIns="0" rtlCol="0" anchor="ctr"/>
-          <a:lstStyle/>
-          <a:p>
-            <a:pPr algn="ctr" indent="0" marL="0">
-              <a:buNone/>
-            </a:pPr>
-            <a:r>
-              <a:rPr lang="en-US" sz="1600" b="1" dirty="0">
-                <a:solidFill>
-                  <a:schemeClr val="tx1"/>
-                </a:solidFill>
-              </a:rPr>
-              <a:t>4</a:t>
-            </a:r>
-            <a:endParaRPr lang="en-US" sz="1600" dirty="0"/>
-          </a:p>
-        </p:txBody>
-      </p:sp>
-      <p:sp>
-        <p:nvSpPr>
-          <p:cNvPr id="27" name="text-242"/>
-          <p:cNvSpPr txBox="1"/>
-          <p:nvPr/>
-        </p:nvSpPr>
-        <p:spPr>
-          <a:xfrm>
-            <a:off x="9075191" y="2606040"/>
-            <a:ext cx="2567864" cy="365760"/>
-          </a:xfrm>
-          <a:prstGeom prst="rect">
-            <a:avLst/>
-          </a:prstGeom>
-          <a:noFill/>
-          <a:ln/>
-        </p:spPr>
-        <p:txBody>
-          <a:bodyPr wrap="square" lIns="0" tIns="0" rIns="0" bIns="0" rtlCol="0" anchor="t"/>
-          <a:lstStyle/>
-          <a:p>
-            <a:pPr algn="ctr" indent="0" marL="0">
-              <a:buNone/>
-            </a:pPr>
-            <a:r>
-              <a:rPr lang="en-US" sz="1800" b="1" dirty="0">
-                <a:solidFill>
-                  <a:schemeClr val="tx2"/>
-                </a:solidFill>
-              </a:rPr>
-              <a:t>12월 26일</a:t>
-            </a:r>
-            <a:endParaRPr lang="en-US" sz="1800" dirty="0"/>
-          </a:p>
-        </p:txBody>
-      </p:sp>
-      <p:sp>
-        <p:nvSpPr>
-          <p:cNvPr id="28" name="text-243"/>
-          <p:cNvSpPr txBox="1"/>
-          <p:nvPr/>
-        </p:nvSpPr>
-        <p:spPr>
-          <a:xfrm>
-            <a:off x="9075191" y="2971800"/>
-            <a:ext cx="2567864" cy="320040"/>
-          </a:xfrm>
-          <a:prstGeom prst="rect">
-            <a:avLst/>
-          </a:prstGeom>
-          <a:noFill/>
-          <a:ln/>
-        </p:spPr>
-        <p:txBody>
-          <a:bodyPr wrap="square" lIns="0" tIns="0" rIns="0" bIns="0" rtlCol="0" anchor="t"/>
-          <a:lstStyle/>
-          <a:p>
-            <a:pPr algn="ctr" indent="0" marL="0">
-              <a:buNone/>
-            </a:pPr>
-            <a:r>
-              <a:rPr lang="en-US" sz="1400" dirty="0">
-                <a:solidFill>
-                  <a:schemeClr val="accent5"/>
-                </a:solidFill>
-              </a:rPr>
-              <a:t>Final Report</a:t>
-            </a:r>
-            <a:endParaRPr lang="en-US" sz="1400" dirty="0"/>
-          </a:p>
-        </p:txBody>
-      </p:sp>
-      <p:sp>
-        <p:nvSpPr>
-          <p:cNvPr id="29" name="card-244"/>
-          <p:cNvSpPr/>
-          <p:nvPr/>
-        </p:nvSpPr>
-        <p:spPr>
-          <a:xfrm>
-            <a:off x="9075191" y="3474720"/>
-            <a:ext cx="2567864" cy="2697480"/>
-          </a:xfrm>
-          <a:prstGeom prst="roundRect">
-            <a:avLst>
-              <a:gd name="adj" fmla="val 4273"/>
-            </a:avLst>
-          </a:prstGeom>
-          <a:solidFill>
-            <a:schemeClr val="bg2"/>
-          </a:solidFill>
-          <a:ln w="12700">
-            <a:solidFill>
-              <a:schemeClr val="bg2"/>
-            </a:solidFill>
-            <a:prstDash val="solid"/>
-          </a:ln>
-        </p:spPr>
-      </p:sp>
-      <p:sp>
-        <p:nvSpPr>
-          <p:cNvPr id="30" name="text-245"/>
-          <p:cNvSpPr txBox="1"/>
-          <p:nvPr/>
-        </p:nvSpPr>
-        <p:spPr>
-          <a:xfrm>
-            <a:off x="9258071" y="3611880"/>
-            <a:ext cx="2202104" cy="320040"/>
-          </a:xfrm>
-          <a:prstGeom prst="rect">
-            <a:avLst/>
-          </a:prstGeom>
-          <a:noFill/>
-          <a:ln/>
-        </p:spPr>
-        <p:txBody>
-          <a:bodyPr wrap="square" lIns="0" tIns="0" rIns="0" bIns="0" rtlCol="0" anchor="t"/>
-          <a:lstStyle/>
-          <a:p>
-            <a:pPr indent="0" marL="0">
-              <a:buNone/>
-            </a:pPr>
-            <a:r>
-              <a:rPr lang="en-US" sz="1300" b="1" dirty="0">
-                <a:solidFill>
-                  <a:schemeClr val="accent3"/>
-                </a:solidFill>
-              </a:rPr>
-              <a:t>Release v1.0</a:t>
-            </a:r>
-            <a:endParaRPr lang="en-US" sz="1300" dirty="0"/>
-          </a:p>
-        </p:txBody>
-      </p:sp>
-      <p:sp>
-        <p:nvSpPr>
-          <p:cNvPr id="31" name="text-246"/>
-          <p:cNvSpPr txBox="1"/>
-          <p:nvPr/>
-        </p:nvSpPr>
-        <p:spPr>
-          <a:xfrm>
-            <a:off x="9258071" y="3977640"/>
-            <a:ext cx="2202104" cy="2103120"/>
-          </a:xfrm>
-          <a:prstGeom prst="rect">
-            <a:avLst/>
-          </a:prstGeom>
-          <a:noFill/>
-          <a:ln/>
-        </p:spPr>
-        <p:txBody>
-          <a:bodyPr wrap="square" lIns="0" tIns="0" rIns="0" bIns="0" rtlCol="0" anchor="t"/>
-          <a:lstStyle/>
-          <a:p>
-            <a:pPr marL="342900" indent="-342900">
-              <a:spcAft>
-                <a:spcPts val="600"/>
-              </a:spcAft>
-              <a:buSzPct val="100000"/>
-              <a:buChar char="•"/>
-            </a:pPr>
-            <a:r>
-              <a:rPr lang="en-US" sz="1400" dirty="0">
-                <a:solidFill>
-                  <a:schemeClr val="tx1"/>
-                </a:solidFill>
-              </a:rPr>
-              <a:t>내 모드 · 재요약 · 가족 공유</a:t>
-            </a:r>
-            <a:endParaRPr lang="en-US" sz="1400" dirty="0"/>
-          </a:p>
-          <a:p>
-            <a:pPr marL="342900" indent="-342900">
-              <a:spcAft>
-                <a:spcPts val="600"/>
-              </a:spcAft>
-              <a:buSzPct val="100000"/>
-              <a:buChar char="•"/>
-            </a:pPr>
-            <a:r>
-              <a:rPr lang="en-US" sz="1400" dirty="0">
-                <a:solidFill>
-                  <a:schemeClr val="tx1"/>
-                </a:solidFill>
-              </a:rPr>
-              <a:t>정확도 · 접근성 점검</a:t>
-            </a:r>
-            <a:endParaRPr lang="en-US" sz="1400" dirty="0"/>
-          </a:p>
-          <a:p>
-            <a:pPr marL="342900" indent="-342900">
-              <a:spcAft>
-                <a:spcPts val="600"/>
-              </a:spcAft>
-              <a:buSzPct val="100000"/>
-              <a:buChar char="•"/>
-            </a:pPr>
-            <a:r>
-              <a:rPr lang="en-US" sz="1400" dirty="0">
-                <a:solidFill>
-                  <a:schemeClr val="tx1"/>
-                </a:solidFill>
-              </a:rPr>
-              <a:t>최종 보고서 · 시연 영상</a:t>
+              <a:t>실제 안내문 원본 사진 (개인정보)</a:t>
             </a:r>
             <a:endParaRPr lang="en-US" sz="1400" dirty="0"/>
           </a:p>
@@ -9904,7 +9521,7 @@
                   <a:schemeClr val="tx2"/>
                 </a:solidFill>
               </a:rPr>
-              <a:t>GitHub 프로젝트 관리</a:t>
+              <a:t>AI 도구 활용 계획</a:t>
             </a:r>
             <a:endParaRPr lang="en-US" sz="3200" dirty="0"/>
           </a:p>
@@ -9912,7 +9529,7 @@
       </p:sp>
       <p:sp>
         <p:nvSpPr>
-          <p:cNvPr id="3" name="text-247"/>
+          <p:cNvPr id="3" name="text-240"/>
           <p:cNvSpPr txBox="1"/>
           <p:nvPr/>
         </p:nvSpPr>
@@ -9940,7 +9557,7 @@
                   <a:schemeClr val="accent5"/>
                 </a:solidFill>
               </a:rPr>
-              <a:t>저장소 하나에 소스 코드와 제출 문서를 모으고, 이슈·커밋·Release로 진행 과정을 남긴다</a:t>
+              <a:t>수업 방침("Claude, ChatGPT, Gemini를 적극 활용, AI 에이전트를 먼저 계획")에 따라 개발 전 과정에 AI를 쓰고 기록한다</a:t>
             </a:r>
             <a:endParaRPr lang="en-US" sz="1600" dirty="0"/>
           </a:p>
@@ -9948,18 +9565,18 @@
       </p:sp>
       <p:sp>
         <p:nvSpPr>
-          <p:cNvPr id="4" name="card-248"/>
+          <p:cNvPr id="4" name="card-241"/>
           <p:cNvSpPr/>
           <p:nvPr/>
         </p:nvSpPr>
         <p:spPr>
           <a:xfrm>
             <a:off x="548640" y="1691640"/>
-            <a:ext cx="5410048" cy="2103120"/>
+            <a:ext cx="5410048" cy="2331720"/>
           </a:xfrm>
           <a:prstGeom prst="roundRect">
             <a:avLst>
-              <a:gd name="adj" fmla="val 5217"/>
+              <a:gd name="adj" fmla="val 4706"/>
             </a:avLst>
           </a:prstGeom>
           <a:solidFill>
@@ -9975,111 +9592,86 @@
       </p:sp>
       <p:sp>
         <p:nvSpPr>
-          <p:cNvPr id="5" name="dot-249"/>
-          <p:cNvSpPr/>
-          <p:nvPr/>
-        </p:nvSpPr>
-        <p:spPr>
-          <a:xfrm>
-            <a:off x="777240" y="1892808"/>
-            <a:ext cx="457200" cy="457200"/>
-          </a:xfrm>
-          <a:prstGeom prst="ellipse">
-            <a:avLst/>
-          </a:prstGeom>
-          <a:solidFill>
-            <a:schemeClr val="accent1"/>
-          </a:solidFill>
-          <a:ln w="12700">
-            <a:solidFill>
-              <a:schemeClr val="accent1"/>
-            </a:solidFill>
-            <a:prstDash val="solid"/>
-          </a:ln>
-        </p:spPr>
-      </p:sp>
-      <p:sp>
-        <p:nvSpPr>
-          <p:cNvPr id="6" name="text-250"/>
+          <p:cNvPr id="5" name="text-242"/>
           <p:cNvSpPr txBox="1"/>
           <p:nvPr/>
         </p:nvSpPr>
         <p:spPr>
           <a:xfrm>
-            <a:off x="777240" y="1892808"/>
-            <a:ext cx="457200" cy="457200"/>
-          </a:xfrm>
-          <a:prstGeom prst="rect">
-            <a:avLst/>
-          </a:prstGeom>
-          <a:noFill/>
-          <a:ln/>
-        </p:spPr>
-        <p:txBody>
-          <a:bodyPr wrap="square" lIns="0" tIns="0" rIns="0" bIns="0" rtlCol="0" anchor="ctr"/>
-          <a:lstStyle/>
-          <a:p>
-            <a:pPr algn="ctr" indent="0" marL="0">
-              <a:buNone/>
-            </a:pPr>
-            <a:r>
-              <a:rPr lang="en-US" sz="1500" b="1" dirty="0">
-                <a:solidFill>
-                  <a:schemeClr val="bg1"/>
-                </a:solidFill>
-              </a:rPr>
-              <a:t>1</a:t>
-            </a:r>
-            <a:endParaRPr lang="en-US" sz="1500" dirty="0"/>
-          </a:p>
-        </p:txBody>
-      </p:sp>
-      <p:sp>
-        <p:nvSpPr>
-          <p:cNvPr id="7" name="text-251"/>
+            <a:off x="822960" y="1874520"/>
+            <a:ext cx="4861408" cy="365760"/>
+          </a:xfrm>
+          <a:prstGeom prst="rect">
+            <a:avLst/>
+          </a:prstGeom>
+          <a:noFill/>
+          <a:ln/>
+        </p:spPr>
+        <p:txBody>
+          <a:bodyPr wrap="square" lIns="0" tIns="0" rIns="0" bIns="0" rtlCol="0" anchor="t"/>
+          <a:lstStyle/>
+          <a:p>
+            <a:pPr indent="0" marL="0">
+              <a:buNone/>
+            </a:pPr>
+            <a:r>
+              <a:rPr lang="en-US" sz="1700" b="1" dirty="0">
+                <a:solidFill>
+                  <a:schemeClr val="tx2"/>
+                </a:solidFill>
+              </a:rPr>
+              <a:t>앱 기능으로 쓰는 AI</a:t>
+            </a:r>
+            <a:endParaRPr lang="en-US" sz="1700" dirty="0"/>
+          </a:p>
+        </p:txBody>
+      </p:sp>
+      <p:sp>
+        <p:nvSpPr>
+          <p:cNvPr id="6" name="text-243"/>
           <p:cNvSpPr txBox="1"/>
           <p:nvPr/>
         </p:nvSpPr>
         <p:spPr>
           <a:xfrm>
-            <a:off x="1417320" y="1892808"/>
-            <a:ext cx="4312768" cy="457200"/>
-          </a:xfrm>
-          <a:prstGeom prst="rect">
-            <a:avLst/>
-          </a:prstGeom>
-          <a:noFill/>
-          <a:ln/>
-        </p:spPr>
-        <p:txBody>
-          <a:bodyPr wrap="square" lIns="0" tIns="0" rIns="0" bIns="0" rtlCol="0" anchor="ctr"/>
+            <a:off x="822960" y="2258568"/>
+            <a:ext cx="4861408" cy="320040"/>
+          </a:xfrm>
+          <a:prstGeom prst="rect">
+            <a:avLst/>
+          </a:prstGeom>
+          <a:noFill/>
+          <a:ln/>
+        </p:spPr>
+        <p:txBody>
+          <a:bodyPr wrap="square" lIns="0" tIns="0" rIns="0" bIns="0" rtlCol="0" anchor="t"/>
           <a:lstStyle/>
           <a:p>
             <a:pPr indent="0" marL="0">
               <a:buNone/>
             </a:pPr>
             <a:r>
-              <a:rPr lang="en-US" sz="1700" b="1" dirty="0">
-                <a:solidFill>
-                  <a:schemeClr val="tx2"/>
-                </a:solidFill>
-              </a:rPr>
-              <a:t>저장소 구성</a:t>
-            </a:r>
-            <a:endParaRPr lang="en-US" sz="1700" dirty="0"/>
-          </a:p>
-        </p:txBody>
-      </p:sp>
-      <p:sp>
-        <p:nvSpPr>
-          <p:cNvPr id="8" name="text-252"/>
+              <a:rPr lang="en-US" sz="1300" b="1" dirty="0">
+                <a:solidFill>
+                  <a:schemeClr val="accent3"/>
+                </a:solidFill>
+              </a:rPr>
+              <a:t>Gemini API</a:t>
+            </a:r>
+            <a:endParaRPr lang="en-US" sz="1300" dirty="0"/>
+          </a:p>
+        </p:txBody>
+      </p:sp>
+      <p:sp>
+        <p:nvSpPr>
+          <p:cNvPr id="7" name="text-244"/>
           <p:cNvSpPr txBox="1"/>
           <p:nvPr/>
         </p:nvSpPr>
         <p:spPr>
           <a:xfrm>
-            <a:off x="822960" y="2514600"/>
-            <a:ext cx="4861408" cy="1188720"/>
+            <a:off x="822960" y="2651760"/>
+            <a:ext cx="4861408" cy="1280160"/>
           </a:xfrm>
           <a:prstGeom prst="rect">
             <a:avLst/>
@@ -10104,7 +9696,7 @@
                   <a:schemeClr val="tx1"/>
                 </a:solidFill>
               </a:rPr>
-              <a:t>app/ : Android Studio 프로젝트 (Java)</a:t>
+              <a:t>안내문 세 줄 요약</a:t>
             </a:r>
             <a:endParaRPr lang="en-US" sz="1400" dirty="0"/>
           </a:p>
@@ -10122,7 +9714,7 @@
                   <a:schemeClr val="tx1"/>
                 </a:solidFill>
               </a:rPr>
-              <a:t>docs/ : 계획서, 개발 계획서, 진행 보고서, 최종 보고서</a:t>
+              <a:t>"이해가 안 돼요" 쉬운 말 재요약</a:t>
             </a:r>
             <a:endParaRPr lang="en-US" sz="1400" dirty="0"/>
           </a:p>
@@ -10140,7 +9732,7 @@
                   <a:schemeClr val="tx1"/>
                 </a:solidFill>
               </a:rPr>
-              <a:t>API 키·서명 키·개인정보 사진은 .gitignore로 제외</a:t>
+              <a:t>규칙 코드 대조를 통과해야 그대로 표시</a:t>
             </a:r>
             <a:endParaRPr lang="en-US" sz="1400" dirty="0"/>
           </a:p>
@@ -10148,18 +9740,18 @@
       </p:sp>
       <p:sp>
         <p:nvSpPr>
-          <p:cNvPr id="9" name="card-253"/>
+          <p:cNvPr id="8" name="card-245"/>
           <p:cNvSpPr/>
           <p:nvPr/>
         </p:nvSpPr>
         <p:spPr>
           <a:xfrm>
             <a:off x="6233008" y="1691640"/>
-            <a:ext cx="5410048" cy="2103120"/>
+            <a:ext cx="5410048" cy="2331720"/>
           </a:xfrm>
           <a:prstGeom prst="roundRect">
             <a:avLst>
-              <a:gd name="adj" fmla="val 5217"/>
+              <a:gd name="adj" fmla="val 4706"/>
             </a:avLst>
           </a:prstGeom>
           <a:solidFill>
@@ -10175,111 +9767,86 @@
       </p:sp>
       <p:sp>
         <p:nvSpPr>
-          <p:cNvPr id="10" name="dot-254"/>
-          <p:cNvSpPr/>
-          <p:nvPr/>
-        </p:nvSpPr>
-        <p:spPr>
-          <a:xfrm>
-            <a:off x="6461608" y="1892808"/>
-            <a:ext cx="457200" cy="457200"/>
-          </a:xfrm>
-          <a:prstGeom prst="ellipse">
-            <a:avLst/>
-          </a:prstGeom>
-          <a:solidFill>
-            <a:schemeClr val="accent1"/>
-          </a:solidFill>
-          <a:ln w="12700">
-            <a:solidFill>
-              <a:schemeClr val="accent1"/>
-            </a:solidFill>
-            <a:prstDash val="solid"/>
-          </a:ln>
-        </p:spPr>
-      </p:sp>
-      <p:sp>
-        <p:nvSpPr>
-          <p:cNvPr id="11" name="text-255"/>
+          <p:cNvPr id="9" name="text-246"/>
           <p:cNvSpPr txBox="1"/>
           <p:nvPr/>
         </p:nvSpPr>
         <p:spPr>
           <a:xfrm>
-            <a:off x="6461608" y="1892808"/>
-            <a:ext cx="457200" cy="457200"/>
-          </a:xfrm>
-          <a:prstGeom prst="rect">
-            <a:avLst/>
-          </a:prstGeom>
-          <a:noFill/>
-          <a:ln/>
-        </p:spPr>
-        <p:txBody>
-          <a:bodyPr wrap="square" lIns="0" tIns="0" rIns="0" bIns="0" rtlCol="0" anchor="ctr"/>
-          <a:lstStyle/>
-          <a:p>
-            <a:pPr algn="ctr" indent="0" marL="0">
-              <a:buNone/>
-            </a:pPr>
-            <a:r>
-              <a:rPr lang="en-US" sz="1500" b="1" dirty="0">
-                <a:solidFill>
-                  <a:schemeClr val="bg1"/>
-                </a:solidFill>
-              </a:rPr>
-              <a:t>2</a:t>
-            </a:r>
-            <a:endParaRPr lang="en-US" sz="1500" dirty="0"/>
-          </a:p>
-        </p:txBody>
-      </p:sp>
-      <p:sp>
-        <p:nvSpPr>
-          <p:cNvPr id="12" name="text-256"/>
+            <a:off x="6507328" y="1874520"/>
+            <a:ext cx="4861408" cy="365760"/>
+          </a:xfrm>
+          <a:prstGeom prst="rect">
+            <a:avLst/>
+          </a:prstGeom>
+          <a:noFill/>
+          <a:ln/>
+        </p:spPr>
+        <p:txBody>
+          <a:bodyPr wrap="square" lIns="0" tIns="0" rIns="0" bIns="0" rtlCol="0" anchor="t"/>
+          <a:lstStyle/>
+          <a:p>
+            <a:pPr indent="0" marL="0">
+              <a:buNone/>
+            </a:pPr>
+            <a:r>
+              <a:rPr lang="en-US" sz="1700" b="1" dirty="0">
+                <a:solidFill>
+                  <a:schemeClr val="tx2"/>
+                </a:solidFill>
+              </a:rPr>
+              <a:t>개발에 쓰는 AI</a:t>
+            </a:r>
+            <a:endParaRPr lang="en-US" sz="1700" dirty="0"/>
+          </a:p>
+        </p:txBody>
+      </p:sp>
+      <p:sp>
+        <p:nvSpPr>
+          <p:cNvPr id="10" name="text-247"/>
           <p:cNvSpPr txBox="1"/>
           <p:nvPr/>
         </p:nvSpPr>
         <p:spPr>
           <a:xfrm>
-            <a:off x="7101688" y="1892808"/>
-            <a:ext cx="4312768" cy="457200"/>
-          </a:xfrm>
-          <a:prstGeom prst="rect">
-            <a:avLst/>
-          </a:prstGeom>
-          <a:noFill/>
-          <a:ln/>
-        </p:spPr>
-        <p:txBody>
-          <a:bodyPr wrap="square" lIns="0" tIns="0" rIns="0" bIns="0" rtlCol="0" anchor="ctr"/>
+            <a:off x="6507328" y="2258568"/>
+            <a:ext cx="4861408" cy="320040"/>
+          </a:xfrm>
+          <a:prstGeom prst="rect">
+            <a:avLst/>
+          </a:prstGeom>
+          <a:noFill/>
+          <a:ln/>
+        </p:spPr>
+        <p:txBody>
+          <a:bodyPr wrap="square" lIns="0" tIns="0" rIns="0" bIns="0" rtlCol="0" anchor="t"/>
           <a:lstStyle/>
           <a:p>
             <a:pPr indent="0" marL="0">
               <a:buNone/>
             </a:pPr>
             <a:r>
-              <a:rPr lang="en-US" sz="1700" b="1" dirty="0">
-                <a:solidFill>
-                  <a:schemeClr val="tx2"/>
-                </a:solidFill>
-              </a:rPr>
-              <a:t>이슈와 라벨</a:t>
-            </a:r>
-            <a:endParaRPr lang="en-US" sz="1700" dirty="0"/>
-          </a:p>
-        </p:txBody>
-      </p:sp>
-      <p:sp>
-        <p:nvSpPr>
-          <p:cNvPr id="13" name="text-257"/>
+              <a:rPr lang="en-US" sz="1300" b="1" dirty="0">
+                <a:solidFill>
+                  <a:schemeClr val="accent3"/>
+                </a:solidFill>
+              </a:rPr>
+              <a:t>Claude (Claude Code) · ChatGPT · Gemini</a:t>
+            </a:r>
+            <a:endParaRPr lang="en-US" sz="1300" dirty="0"/>
+          </a:p>
+        </p:txBody>
+      </p:sp>
+      <p:sp>
+        <p:nvSpPr>
+          <p:cNvPr id="11" name="text-248"/>
           <p:cNvSpPr txBox="1"/>
           <p:nvPr/>
         </p:nvSpPr>
         <p:spPr>
           <a:xfrm>
-            <a:off x="6507328" y="2514600"/>
-            <a:ext cx="4861408" cy="1188720"/>
+            <a:off x="6507328" y="2651760"/>
+            <a:ext cx="4861408" cy="1280160"/>
           </a:xfrm>
           <a:prstGeom prst="rect">
             <a:avLst/>
@@ -10304,7 +9871,7 @@
                   <a:schemeClr val="tx1"/>
                 </a:solidFill>
               </a:rPr>
-              <a:t>기능 단위 이슈를 마일스톤에 배정</a:t>
+              <a:t>유사 서비스 조사, 문서·목업 초안</a:t>
             </a:r>
             <a:endParaRPr lang="en-US" sz="1400" dirty="0"/>
           </a:p>
@@ -10322,7 +9889,7 @@
                   <a:schemeClr val="tx1"/>
                 </a:solidFill>
               </a:rPr>
-              <a:t>라벨: 필수 · 추가 · 향후 · bug</a:t>
+              <a:t>Activity·레이아웃·정규식 코드 초안</a:t>
             </a:r>
             <a:endParaRPr lang="en-US" sz="1400" dirty="0"/>
           </a:p>
@@ -10340,7 +9907,7 @@
                   <a:schemeClr val="tx1"/>
                 </a:solidFill>
               </a:rPr>
-              <a:t>미팅 피드백도 이슈로 등록해 반영 여부 확인</a:t>
+              <a:t>오류 원인 분석과 디버깅</a:t>
             </a:r>
             <a:endParaRPr lang="en-US" sz="1400" dirty="0"/>
           </a:p>
@@ -10348,26 +9915,87 @@
       </p:sp>
       <p:sp>
         <p:nvSpPr>
-          <p:cNvPr id="14" name="card-258"/>
+          <p:cNvPr id="12" name="text-249"/>
+          <p:cNvSpPr txBox="1"/>
+          <p:nvPr/>
+        </p:nvSpPr>
+        <p:spPr>
+          <a:xfrm>
+            <a:off x="548640" y="4251960"/>
+            <a:ext cx="11094415" cy="365760"/>
+          </a:xfrm>
+          <a:prstGeom prst="rect">
+            <a:avLst/>
+          </a:prstGeom>
+          <a:noFill/>
+          <a:ln/>
+        </p:spPr>
+        <p:txBody>
+          <a:bodyPr wrap="square" lIns="0" tIns="0" rIns="0" bIns="0" rtlCol="0" anchor="t"/>
+          <a:lstStyle/>
+          <a:p>
+            <a:pPr indent="0" marL="0">
+              <a:buNone/>
+            </a:pPr>
+            <a:r>
+              <a:rPr lang="en-US" sz="1700" b="1" dirty="0">
+                <a:solidFill>
+                  <a:schemeClr val="tx2"/>
+                </a:solidFill>
+              </a:rPr>
+              <a:t>활용 원칙</a:t>
+            </a:r>
+            <a:endParaRPr lang="en-US" sz="1700" dirty="0"/>
+          </a:p>
+        </p:txBody>
+      </p:sp>
+      <p:sp>
+        <p:nvSpPr>
+          <p:cNvPr id="13" name="card-250"/>
           <p:cNvSpPr/>
           <p:nvPr/>
         </p:nvSpPr>
         <p:spPr>
           <a:xfrm>
-            <a:off x="548640" y="4023360"/>
-            <a:ext cx="5410048" cy="2103120"/>
+            <a:off x="548640" y="4709160"/>
+            <a:ext cx="2602154" cy="1463040"/>
           </a:xfrm>
           <a:prstGeom prst="roundRect">
             <a:avLst>
-              <a:gd name="adj" fmla="val 5217"/>
+              <a:gd name="adj" fmla="val 7500"/>
             </a:avLst>
           </a:prstGeom>
           <a:solidFill>
-            <a:schemeClr val="bg2"/>
+            <a:schemeClr val="bg1"/>
+          </a:solidFill>
+          <a:ln w="15875">
+            <a:solidFill>
+              <a:schemeClr val="accent6"/>
+            </a:solidFill>
+            <a:prstDash val="solid"/>
+          </a:ln>
+        </p:spPr>
+      </p:sp>
+      <p:sp>
+        <p:nvSpPr>
+          <p:cNvPr id="14" name="dot-251"/>
+          <p:cNvSpPr/>
+          <p:nvPr/>
+        </p:nvSpPr>
+        <p:spPr>
+          <a:xfrm>
+            <a:off x="731520" y="4892040"/>
+            <a:ext cx="411480" cy="411480"/>
+          </a:xfrm>
+          <a:prstGeom prst="ellipse">
+            <a:avLst/>
+          </a:prstGeom>
+          <a:solidFill>
+            <a:schemeClr val="accent2"/>
           </a:solidFill>
           <a:ln w="12700">
             <a:solidFill>
-              <a:schemeClr val="bg2"/>
+              <a:schemeClr val="accent2"/>
             </a:solidFill>
             <a:prstDash val="solid"/>
           </a:ln>
@@ -10375,24 +10003,159 @@
       </p:sp>
       <p:sp>
         <p:nvSpPr>
-          <p:cNvPr id="15" name="dot-259"/>
+          <p:cNvPr id="15" name="text-252"/>
+          <p:cNvSpPr txBox="1"/>
+          <p:nvPr/>
+        </p:nvSpPr>
+        <p:spPr>
+          <a:xfrm>
+            <a:off x="731520" y="4892040"/>
+            <a:ext cx="411480" cy="411480"/>
+          </a:xfrm>
+          <a:prstGeom prst="rect">
+            <a:avLst/>
+          </a:prstGeom>
+          <a:noFill/>
+          <a:ln/>
+        </p:spPr>
+        <p:txBody>
+          <a:bodyPr wrap="square" lIns="0" tIns="0" rIns="0" bIns="0" rtlCol="0" anchor="ctr"/>
+          <a:lstStyle/>
+          <a:p>
+            <a:pPr algn="ctr" indent="0" marL="0">
+              <a:buNone/>
+            </a:pPr>
+            <a:r>
+              <a:rPr lang="en-US" sz="1400" b="1" dirty="0">
+                <a:solidFill>
+                  <a:schemeClr val="tx1"/>
+                </a:solidFill>
+              </a:rPr>
+              <a:t>1</a:t>
+            </a:r>
+            <a:endParaRPr lang="en-US" sz="1400" dirty="0"/>
+          </a:p>
+        </p:txBody>
+      </p:sp>
+      <p:sp>
+        <p:nvSpPr>
+          <p:cNvPr id="16" name="text-253"/>
+          <p:cNvSpPr txBox="1"/>
+          <p:nvPr/>
+        </p:nvSpPr>
+        <p:spPr>
+          <a:xfrm>
+            <a:off x="731520" y="5394960"/>
+            <a:ext cx="2236394" cy="320040"/>
+          </a:xfrm>
+          <a:prstGeom prst="rect">
+            <a:avLst/>
+          </a:prstGeom>
+          <a:noFill/>
+          <a:ln/>
+        </p:spPr>
+        <p:txBody>
+          <a:bodyPr wrap="square" lIns="0" tIns="0" rIns="0" bIns="0" rtlCol="0" anchor="t"/>
+          <a:lstStyle/>
+          <a:p>
+            <a:pPr indent="0" marL="0">
+              <a:buNone/>
+            </a:pPr>
+            <a:r>
+              <a:rPr lang="en-US" sz="1400" b="1" dirty="0">
+                <a:solidFill>
+                  <a:schemeClr val="tx1"/>
+                </a:solidFill>
+              </a:rPr>
+              <a:t>초안은 AI, 검증은 직접</a:t>
+            </a:r>
+            <a:endParaRPr lang="en-US" sz="1400" dirty="0"/>
+          </a:p>
+        </p:txBody>
+      </p:sp>
+      <p:sp>
+        <p:nvSpPr>
+          <p:cNvPr id="17" name="text-254"/>
+          <p:cNvSpPr txBox="1"/>
+          <p:nvPr/>
+        </p:nvSpPr>
+        <p:spPr>
+          <a:xfrm>
+            <a:off x="731520" y="5715000"/>
+            <a:ext cx="2236394" cy="365760"/>
+          </a:xfrm>
+          <a:prstGeom prst="rect">
+            <a:avLst/>
+          </a:prstGeom>
+          <a:noFill/>
+          <a:ln/>
+        </p:spPr>
+        <p:txBody>
+          <a:bodyPr wrap="square" lIns="0" tIns="0" rIns="0" bIns="0" rtlCol="0" anchor="t"/>
+          <a:lstStyle/>
+          <a:p>
+            <a:pPr indent="0" marL="0">
+              <a:buNone/>
+            </a:pPr>
+            <a:r>
+              <a:rPr lang="en-US" sz="1200" dirty="0">
+                <a:solidFill>
+                  <a:schemeClr val="accent5"/>
+                </a:solidFill>
+              </a:rPr>
+              <a:t>실기기 실행과 단위 테스트 후 반영</a:t>
+            </a:r>
+            <a:endParaRPr lang="en-US" sz="1200" dirty="0"/>
+          </a:p>
+        </p:txBody>
+      </p:sp>
+      <p:sp>
+        <p:nvSpPr>
+          <p:cNvPr id="18" name="card-255"/>
           <p:cNvSpPr/>
           <p:nvPr/>
         </p:nvSpPr>
         <p:spPr>
           <a:xfrm>
-            <a:off x="777240" y="4224528"/>
-            <a:ext cx="457200" cy="457200"/>
+            <a:off x="3379394" y="4709160"/>
+            <a:ext cx="2602154" cy="1463040"/>
+          </a:xfrm>
+          <a:prstGeom prst="roundRect">
+            <a:avLst>
+              <a:gd name="adj" fmla="val 7500"/>
+            </a:avLst>
+          </a:prstGeom>
+          <a:solidFill>
+            <a:schemeClr val="bg1"/>
+          </a:solidFill>
+          <a:ln w="15875">
+            <a:solidFill>
+              <a:schemeClr val="accent6"/>
+            </a:solidFill>
+            <a:prstDash val="solid"/>
+          </a:ln>
+        </p:spPr>
+      </p:sp>
+      <p:sp>
+        <p:nvSpPr>
+          <p:cNvPr id="19" name="dot-256"/>
+          <p:cNvSpPr/>
+          <p:nvPr/>
+        </p:nvSpPr>
+        <p:spPr>
+          <a:xfrm>
+            <a:off x="3562274" y="4892040"/>
+            <a:ext cx="411480" cy="411480"/>
           </a:xfrm>
           <a:prstGeom prst="ellipse">
             <a:avLst/>
           </a:prstGeom>
           <a:solidFill>
-            <a:schemeClr val="accent1"/>
+            <a:schemeClr val="accent2"/>
           </a:solidFill>
           <a:ln w="12700">
             <a:solidFill>
-              <a:schemeClr val="accent1"/>
+              <a:schemeClr val="accent2"/>
             </a:solidFill>
             <a:prstDash val="solid"/>
           </a:ln>
@@ -10400,14 +10163,14 @@
       </p:sp>
       <p:sp>
         <p:nvSpPr>
-          <p:cNvPr id="16" name="text-260"/>
+          <p:cNvPr id="20" name="text-257"/>
           <p:cNvSpPr txBox="1"/>
           <p:nvPr/>
         </p:nvSpPr>
         <p:spPr>
           <a:xfrm>
-            <a:off x="777240" y="4224528"/>
-            <a:ext cx="457200" cy="457200"/>
+            <a:off x="3562274" y="4892040"/>
+            <a:ext cx="411480" cy="411480"/>
           </a:xfrm>
           <a:prstGeom prst="rect">
             <a:avLst/>
@@ -10423,63 +10186,63 @@
               <a:buNone/>
             </a:pPr>
             <a:r>
-              <a:rPr lang="en-US" sz="1500" b="1" dirty="0">
-                <a:solidFill>
-                  <a:schemeClr val="bg1"/>
-                </a:solidFill>
-              </a:rPr>
-              <a:t>3</a:t>
-            </a:r>
-            <a:endParaRPr lang="en-US" sz="1500" dirty="0"/>
-          </a:p>
-        </p:txBody>
-      </p:sp>
-      <p:sp>
-        <p:nvSpPr>
-          <p:cNvPr id="17" name="text-261"/>
+              <a:rPr lang="en-US" sz="1400" b="1" dirty="0">
+                <a:solidFill>
+                  <a:schemeClr val="tx1"/>
+                </a:solidFill>
+              </a:rPr>
+              <a:t>2</a:t>
+            </a:r>
+            <a:endParaRPr lang="en-US" sz="1400" dirty="0"/>
+          </a:p>
+        </p:txBody>
+      </p:sp>
+      <p:sp>
+        <p:nvSpPr>
+          <p:cNvPr id="21" name="text-258"/>
           <p:cNvSpPr txBox="1"/>
           <p:nvPr/>
         </p:nvSpPr>
         <p:spPr>
           <a:xfrm>
-            <a:off x="1417320" y="4224528"/>
-            <a:ext cx="4312768" cy="457200"/>
-          </a:xfrm>
-          <a:prstGeom prst="rect">
-            <a:avLst/>
-          </a:prstGeom>
-          <a:noFill/>
-          <a:ln/>
-        </p:spPr>
-        <p:txBody>
-          <a:bodyPr wrap="square" lIns="0" tIns="0" rIns="0" bIns="0" rtlCol="0" anchor="ctr"/>
+            <a:off x="3562274" y="5394960"/>
+            <a:ext cx="2236394" cy="320040"/>
+          </a:xfrm>
+          <a:prstGeom prst="rect">
+            <a:avLst/>
+          </a:prstGeom>
+          <a:noFill/>
+          <a:ln/>
+        </p:spPr>
+        <p:txBody>
+          <a:bodyPr wrap="square" lIns="0" tIns="0" rIns="0" bIns="0" rtlCol="0" anchor="t"/>
           <a:lstStyle/>
           <a:p>
             <a:pPr indent="0" marL="0">
               <a:buNone/>
             </a:pPr>
             <a:r>
-              <a:rPr lang="en-US" sz="1700" b="1" dirty="0">
-                <a:solidFill>
-                  <a:schemeClr val="tx2"/>
-                </a:solidFill>
-              </a:rPr>
-              <a:t>커밋</a:t>
-            </a:r>
-            <a:endParaRPr lang="en-US" sz="1700" dirty="0"/>
-          </a:p>
-        </p:txBody>
-      </p:sp>
-      <p:sp>
-        <p:nvSpPr>
-          <p:cNvPr id="18" name="text-262"/>
+              <a:rPr lang="en-US" sz="1400" b="1" dirty="0">
+                <a:solidFill>
+                  <a:schemeClr val="tx1"/>
+                </a:solidFill>
+              </a:rPr>
+              <a:t>정확성은 규칙 코드로</a:t>
+            </a:r>
+            <a:endParaRPr lang="en-US" sz="1400" dirty="0"/>
+          </a:p>
+        </p:txBody>
+      </p:sp>
+      <p:sp>
+        <p:nvSpPr>
+          <p:cNvPr id="22" name="text-259"/>
           <p:cNvSpPr txBox="1"/>
           <p:nvPr/>
         </p:nvSpPr>
         <p:spPr>
           <a:xfrm>
-            <a:off x="822960" y="4846320"/>
-            <a:ext cx="4861408" cy="1188720"/>
+            <a:off x="3562274" y="5715000"/>
+            <a:ext cx="2236394" cy="365760"/>
           </a:xfrm>
           <a:prstGeom prst="rect">
             <a:avLst/>
@@ -10491,83 +10254,68 @@
           <a:bodyPr wrap="square" lIns="0" tIns="0" rIns="0" bIns="0" rtlCol="0" anchor="t"/>
           <a:lstStyle/>
           <a:p>
-            <a:pPr marL="342900" indent="-342900">
-              <a:spcAft>
-                <a:spcPts val="400"/>
-              </a:spcAft>
-              <a:buSzPct val="100000"/>
-              <a:buChar char="•"/>
-            </a:pPr>
-            <a:r>
-              <a:rPr lang="en-US" sz="1400" dirty="0">
-                <a:solidFill>
-                  <a:schemeClr val="tx1"/>
-                </a:solidFill>
-              </a:rPr>
-              <a:t>1인 프로젝트로 main 브랜치 하나 운영</a:t>
-            </a:r>
-            <a:endParaRPr lang="en-US" sz="1400" dirty="0"/>
-          </a:p>
-          <a:p>
-            <a:pPr marL="342900" indent="-342900">
-              <a:spcAft>
-                <a:spcPts val="400"/>
-              </a:spcAft>
-              <a:buSzPct val="100000"/>
-              <a:buChar char="•"/>
-            </a:pPr>
-            <a:r>
-              <a:rPr lang="en-US" sz="1400" dirty="0">
-                <a:solidFill>
-                  <a:schemeClr val="tx1"/>
-                </a:solidFill>
-              </a:rPr>
-              <a:t>기능 하나가 동작하는 단위로 커밋</a:t>
-            </a:r>
-            <a:endParaRPr lang="en-US" sz="1400" dirty="0"/>
-          </a:p>
-          <a:p>
-            <a:pPr marL="342900" indent="-342900">
-              <a:spcAft>
-                <a:spcPts val="400"/>
-              </a:spcAft>
-              <a:buSzPct val="100000"/>
-              <a:buChar char="•"/>
-            </a:pPr>
-            <a:r>
-              <a:rPr lang="en-US" sz="1400" dirty="0">
-                <a:solidFill>
-                  <a:schemeClr val="tx1"/>
-                </a:solidFill>
-              </a:rPr>
-              <a:t>메시지 예: 촬영 안내 화면 추가 (#1)</a:t>
-            </a:r>
-            <a:endParaRPr lang="en-US" sz="1400" dirty="0"/>
-          </a:p>
-        </p:txBody>
-      </p:sp>
-      <p:sp>
-        <p:nvSpPr>
-          <p:cNvPr id="19" name="card-263"/>
+            <a:pPr indent="0" marL="0">
+              <a:buNone/>
+            </a:pPr>
+            <a:r>
+              <a:rPr lang="en-US" sz="1200" dirty="0">
+                <a:solidFill>
+                  <a:schemeClr val="accent5"/>
+                </a:solidFill>
+              </a:rPr>
+              <a:t>날짜·금액은 정규식으로 대조</a:t>
+            </a:r>
+            <a:endParaRPr lang="en-US" sz="1200" dirty="0"/>
+          </a:p>
+        </p:txBody>
+      </p:sp>
+      <p:sp>
+        <p:nvSpPr>
+          <p:cNvPr id="23" name="card-260"/>
           <p:cNvSpPr/>
           <p:nvPr/>
         </p:nvSpPr>
         <p:spPr>
           <a:xfrm>
-            <a:off x="6233008" y="4023360"/>
-            <a:ext cx="5410048" cy="2103120"/>
+            <a:off x="6210148" y="4709160"/>
+            <a:ext cx="2602154" cy="1463040"/>
           </a:xfrm>
           <a:prstGeom prst="roundRect">
             <a:avLst>
-              <a:gd name="adj" fmla="val 5217"/>
+              <a:gd name="adj" fmla="val 7500"/>
             </a:avLst>
           </a:prstGeom>
           <a:solidFill>
-            <a:schemeClr val="bg2"/>
+            <a:schemeClr val="bg1"/>
+          </a:solidFill>
+          <a:ln w="15875">
+            <a:solidFill>
+              <a:schemeClr val="accent6"/>
+            </a:solidFill>
+            <a:prstDash val="solid"/>
+          </a:ln>
+        </p:spPr>
+      </p:sp>
+      <p:sp>
+        <p:nvSpPr>
+          <p:cNvPr id="24" name="dot-261"/>
+          <p:cNvSpPr/>
+          <p:nvPr/>
+        </p:nvSpPr>
+        <p:spPr>
+          <a:xfrm>
+            <a:off x="6393028" y="4892040"/>
+            <a:ext cx="411480" cy="411480"/>
+          </a:xfrm>
+          <a:prstGeom prst="ellipse">
+            <a:avLst/>
+          </a:prstGeom>
+          <a:solidFill>
+            <a:schemeClr val="accent2"/>
           </a:solidFill>
           <a:ln w="12700">
             <a:solidFill>
-              <a:schemeClr val="bg2"/>
+              <a:schemeClr val="accent2"/>
             </a:solidFill>
             <a:prstDash val="solid"/>
           </a:ln>
@@ -10575,24 +10323,159 @@
       </p:sp>
       <p:sp>
         <p:nvSpPr>
-          <p:cNvPr id="20" name="dot-264"/>
+          <p:cNvPr id="25" name="text-262"/>
+          <p:cNvSpPr txBox="1"/>
+          <p:nvPr/>
+        </p:nvSpPr>
+        <p:spPr>
+          <a:xfrm>
+            <a:off x="6393028" y="4892040"/>
+            <a:ext cx="411480" cy="411480"/>
+          </a:xfrm>
+          <a:prstGeom prst="rect">
+            <a:avLst/>
+          </a:prstGeom>
+          <a:noFill/>
+          <a:ln/>
+        </p:spPr>
+        <p:txBody>
+          <a:bodyPr wrap="square" lIns="0" tIns="0" rIns="0" bIns="0" rtlCol="0" anchor="ctr"/>
+          <a:lstStyle/>
+          <a:p>
+            <a:pPr algn="ctr" indent="0" marL="0">
+              <a:buNone/>
+            </a:pPr>
+            <a:r>
+              <a:rPr lang="en-US" sz="1400" b="1" dirty="0">
+                <a:solidFill>
+                  <a:schemeClr val="tx1"/>
+                </a:solidFill>
+              </a:rPr>
+              <a:t>3</a:t>
+            </a:r>
+            <a:endParaRPr lang="en-US" sz="1400" dirty="0"/>
+          </a:p>
+        </p:txBody>
+      </p:sp>
+      <p:sp>
+        <p:nvSpPr>
+          <p:cNvPr id="26" name="text-263"/>
+          <p:cNvSpPr txBox="1"/>
+          <p:nvPr/>
+        </p:nvSpPr>
+        <p:spPr>
+          <a:xfrm>
+            <a:off x="6393028" y="5394960"/>
+            <a:ext cx="2236394" cy="320040"/>
+          </a:xfrm>
+          <a:prstGeom prst="rect">
+            <a:avLst/>
+          </a:prstGeom>
+          <a:noFill/>
+          <a:ln/>
+        </p:spPr>
+        <p:txBody>
+          <a:bodyPr wrap="square" lIns="0" tIns="0" rIns="0" bIns="0" rtlCol="0" anchor="t"/>
+          <a:lstStyle/>
+          <a:p>
+            <a:pPr indent="0" marL="0">
+              <a:buNone/>
+            </a:pPr>
+            <a:r>
+              <a:rPr lang="en-US" sz="1400" b="1" dirty="0">
+                <a:solidFill>
+                  <a:schemeClr val="tx1"/>
+                </a:solidFill>
+              </a:rPr>
+              <a:t>개인정보·키는 넘기지 않음</a:t>
+            </a:r>
+            <a:endParaRPr lang="en-US" sz="1400" dirty="0"/>
+          </a:p>
+        </p:txBody>
+      </p:sp>
+      <p:sp>
+        <p:nvSpPr>
+          <p:cNvPr id="27" name="text-264"/>
+          <p:cNvSpPr txBox="1"/>
+          <p:nvPr/>
+        </p:nvSpPr>
+        <p:spPr>
+          <a:xfrm>
+            <a:off x="6393028" y="5715000"/>
+            <a:ext cx="2236394" cy="365760"/>
+          </a:xfrm>
+          <a:prstGeom prst="rect">
+            <a:avLst/>
+          </a:prstGeom>
+          <a:noFill/>
+          <a:ln/>
+        </p:spPr>
+        <p:txBody>
+          <a:bodyPr wrap="square" lIns="0" tIns="0" rIns="0" bIns="0" rtlCol="0" anchor="t"/>
+          <a:lstStyle/>
+          <a:p>
+            <a:pPr indent="0" marL="0">
+              <a:buNone/>
+            </a:pPr>
+            <a:r>
+              <a:rPr lang="en-US" sz="1200" dirty="0">
+                <a:solidFill>
+                  <a:schemeClr val="accent5"/>
+                </a:solidFill>
+              </a:rPr>
+              <a:t>실제 안내문 원본과 API 키 입력 금지</a:t>
+            </a:r>
+            <a:endParaRPr lang="en-US" sz="1200" dirty="0"/>
+          </a:p>
+        </p:txBody>
+      </p:sp>
+      <p:sp>
+        <p:nvSpPr>
+          <p:cNvPr id="28" name="card-265"/>
           <p:cNvSpPr/>
           <p:nvPr/>
         </p:nvSpPr>
         <p:spPr>
           <a:xfrm>
-            <a:off x="6461608" y="4224528"/>
-            <a:ext cx="457200" cy="457200"/>
+            <a:off x="9040901" y="4709160"/>
+            <a:ext cx="2602154" cy="1463040"/>
+          </a:xfrm>
+          <a:prstGeom prst="roundRect">
+            <a:avLst>
+              <a:gd name="adj" fmla="val 7500"/>
+            </a:avLst>
+          </a:prstGeom>
+          <a:solidFill>
+            <a:schemeClr val="bg1"/>
+          </a:solidFill>
+          <a:ln w="15875">
+            <a:solidFill>
+              <a:schemeClr val="accent6"/>
+            </a:solidFill>
+            <a:prstDash val="solid"/>
+          </a:ln>
+        </p:spPr>
+      </p:sp>
+      <p:sp>
+        <p:nvSpPr>
+          <p:cNvPr id="29" name="dot-266"/>
+          <p:cNvSpPr/>
+          <p:nvPr/>
+        </p:nvSpPr>
+        <p:spPr>
+          <a:xfrm>
+            <a:off x="9223781" y="4892040"/>
+            <a:ext cx="411480" cy="411480"/>
           </a:xfrm>
           <a:prstGeom prst="ellipse">
             <a:avLst/>
           </a:prstGeom>
           <a:solidFill>
-            <a:schemeClr val="accent1"/>
+            <a:schemeClr val="accent2"/>
           </a:solidFill>
           <a:ln w="12700">
             <a:solidFill>
-              <a:schemeClr val="accent1"/>
+              <a:schemeClr val="accent2"/>
             </a:solidFill>
             <a:prstDash val="solid"/>
           </a:ln>
@@ -10600,14 +10483,14 @@
       </p:sp>
       <p:sp>
         <p:nvSpPr>
-          <p:cNvPr id="21" name="text-265"/>
+          <p:cNvPr id="30" name="text-267"/>
           <p:cNvSpPr txBox="1"/>
           <p:nvPr/>
         </p:nvSpPr>
         <p:spPr>
           <a:xfrm>
-            <a:off x="6461608" y="4224528"/>
-            <a:ext cx="457200" cy="457200"/>
+            <a:off x="9223781" y="4892040"/>
+            <a:ext cx="411480" cy="411480"/>
           </a:xfrm>
           <a:prstGeom prst="rect">
             <a:avLst/>
@@ -10623,63 +10506,63 @@
               <a:buNone/>
             </a:pPr>
             <a:r>
-              <a:rPr lang="en-US" sz="1500" b="1" dirty="0">
-                <a:solidFill>
-                  <a:schemeClr val="bg1"/>
+              <a:rPr lang="en-US" sz="1400" b="1" dirty="0">
+                <a:solidFill>
+                  <a:schemeClr val="tx1"/>
                 </a:solidFill>
               </a:rPr>
               <a:t>4</a:t>
             </a:r>
-            <a:endParaRPr lang="en-US" sz="1500" dirty="0"/>
-          </a:p>
-        </p:txBody>
-      </p:sp>
-      <p:sp>
-        <p:nvSpPr>
-          <p:cNvPr id="22" name="text-266"/>
+            <a:endParaRPr lang="en-US" sz="1400" dirty="0"/>
+          </a:p>
+        </p:txBody>
+      </p:sp>
+      <p:sp>
+        <p:nvSpPr>
+          <p:cNvPr id="31" name="text-268"/>
           <p:cNvSpPr txBox="1"/>
           <p:nvPr/>
         </p:nvSpPr>
         <p:spPr>
           <a:xfrm>
-            <a:off x="7101688" y="4224528"/>
-            <a:ext cx="4312768" cy="457200"/>
-          </a:xfrm>
-          <a:prstGeom prst="rect">
-            <a:avLst/>
-          </a:prstGeom>
-          <a:noFill/>
-          <a:ln/>
-        </p:spPr>
-        <p:txBody>
-          <a:bodyPr wrap="square" lIns="0" tIns="0" rIns="0" bIns="0" rtlCol="0" anchor="ctr"/>
+            <a:off x="9223781" y="5394960"/>
+            <a:ext cx="2236394" cy="320040"/>
+          </a:xfrm>
+          <a:prstGeom prst="rect">
+            <a:avLst/>
+          </a:prstGeom>
+          <a:noFill/>
+          <a:ln/>
+        </p:spPr>
+        <p:txBody>
+          <a:bodyPr wrap="square" lIns="0" tIns="0" rIns="0" bIns="0" rtlCol="0" anchor="t"/>
           <a:lstStyle/>
           <a:p>
             <a:pPr indent="0" marL="0">
               <a:buNone/>
             </a:pPr>
             <a:r>
-              <a:rPr lang="en-US" sz="1700" b="1" dirty="0">
-                <a:solidFill>
-                  <a:schemeClr val="tx2"/>
-                </a:solidFill>
-              </a:rPr>
-              <a:t>진행 보고</a:t>
-            </a:r>
-            <a:endParaRPr lang="en-US" sz="1700" dirty="0"/>
-          </a:p>
-        </p:txBody>
-      </p:sp>
-      <p:sp>
-        <p:nvSpPr>
-          <p:cNvPr id="23" name="text-267"/>
+              <a:rPr lang="en-US" sz="1400" b="1" dirty="0">
+                <a:solidFill>
+                  <a:schemeClr val="tx1"/>
+                </a:solidFill>
+              </a:rPr>
+              <a:t>활용 내역 기록</a:t>
+            </a:r>
+            <a:endParaRPr lang="en-US" sz="1400" dirty="0"/>
+          </a:p>
+        </p:txBody>
+      </p:sp>
+      <p:sp>
+        <p:nvSpPr>
+          <p:cNvPr id="32" name="text-269"/>
           <p:cNvSpPr txBox="1"/>
           <p:nvPr/>
         </p:nvSpPr>
         <p:spPr>
           <a:xfrm>
-            <a:off x="6507328" y="4846320"/>
-            <a:ext cx="4861408" cy="1188720"/>
+            <a:off x="9223781" y="5715000"/>
+            <a:ext cx="2236394" cy="365760"/>
           </a:xfrm>
           <a:prstGeom prst="rect">
             <a:avLst/>
@@ -10691,58 +10574,18 @@
           <a:bodyPr wrap="square" lIns="0" tIns="0" rIns="0" bIns="0" rtlCol="0" anchor="t"/>
           <a:lstStyle/>
           <a:p>
-            <a:pPr marL="342900" indent="-342900">
-              <a:spcAft>
-                <a:spcPts val="400"/>
-              </a:spcAft>
-              <a:buSzPct val="100000"/>
-              <a:buChar char="•"/>
-            </a:pPr>
-            <a:r>
-              <a:rPr lang="en-US" sz="1400" dirty="0">
-                <a:solidFill>
-                  <a:schemeClr val="tx1"/>
-                </a:solidFill>
-              </a:rPr>
-              <a:t>미팅 전 docs/progress/meeting-N.md 작성</a:t>
-            </a:r>
-            <a:endParaRPr lang="en-US" sz="1400" dirty="0"/>
-          </a:p>
-          <a:p>
-            <a:pPr marL="342900" indent="-342900">
-              <a:spcAft>
-                <a:spcPts val="400"/>
-              </a:spcAft>
-              <a:buSzPct val="100000"/>
-              <a:buChar char="•"/>
-            </a:pPr>
-            <a:r>
-              <a:rPr lang="en-US" sz="1400" dirty="0">
-                <a:solidFill>
-                  <a:schemeClr val="tx1"/>
-                </a:solidFill>
-              </a:rPr>
-              <a:t>Release v0.1 · v0.2 · v1.0에 APK 첨부</a:t>
-            </a:r>
-            <a:endParaRPr lang="en-US" sz="1400" dirty="0"/>
-          </a:p>
-          <a:p>
-            <a:pPr marL="342900" indent="-342900">
-              <a:spcAft>
-                <a:spcPts val="400"/>
-              </a:spcAft>
-              <a:buSzPct val="100000"/>
-              <a:buChar char="•"/>
-            </a:pPr>
-            <a:r>
-              <a:rPr lang="en-US" sz="1400" dirty="0">
-                <a:solidFill>
-                  <a:schemeClr val="tx1"/>
-                </a:solidFill>
-              </a:rPr>
-              <a:t>태그 비교로 미팅 사이 변경 내역 확인</a:t>
-            </a:r>
-            <a:endParaRPr lang="en-US" sz="1400" dirty="0"/>
+            <a:pPr indent="0" marL="0">
+              <a:buNone/>
+            </a:pPr>
+            <a:r>
+              <a:rPr lang="en-US" sz="1200" dirty="0">
+                <a:solidFill>
+                  <a:schemeClr val="accent5"/>
+                </a:solidFill>
+              </a:rPr>
+              <a:t>docs/ai-usage.md에 도구와 확인 내용 기록</a:t>
+            </a:r>
+            <a:endParaRPr lang="en-US" sz="1200" dirty="0"/>
           </a:p>
         </p:txBody>
       </p:sp>
@@ -10848,7 +10691,7 @@
                   <a:schemeClr val="tx2"/>
                 </a:solidFill>
               </a:rPr>
-              <a:t>AI 도구 활용 계획</a:t>
+              <a:t>예상 문제와 대응 방안</a:t>
             </a:r>
             <a:endParaRPr lang="en-US" sz="3200" dirty="0"/>
           </a:p>
@@ -10856,7 +10699,7 @@
       </p:sp>
       <p:sp>
         <p:nvSpPr>
-          <p:cNvPr id="3" name="text-268"/>
+          <p:cNvPr id="3" name="text-270"/>
           <p:cNvSpPr txBox="1"/>
           <p:nvPr/>
         </p:nvSpPr>
@@ -10884,1176 +10727,6 @@
                   <a:schemeClr val="accent5"/>
                 </a:solidFill>
               </a:rPr>
-              <a:t>수업 방침("Claude, ChatGPT, Gemini를 적극 활용, AI 에이전트를 먼저 계획")에 따라 개발 전 과정에 AI를 쓰고 기록한다</a:t>
-            </a:r>
-            <a:endParaRPr lang="en-US" sz="1600" dirty="0"/>
-          </a:p>
-        </p:txBody>
-      </p:sp>
-      <p:sp>
-        <p:nvSpPr>
-          <p:cNvPr id="4" name="card-269"/>
-          <p:cNvSpPr/>
-          <p:nvPr/>
-        </p:nvSpPr>
-        <p:spPr>
-          <a:xfrm>
-            <a:off x="548640" y="1691640"/>
-            <a:ext cx="5410048" cy="2331720"/>
-          </a:xfrm>
-          <a:prstGeom prst="roundRect">
-            <a:avLst>
-              <a:gd name="adj" fmla="val 4706"/>
-            </a:avLst>
-          </a:prstGeom>
-          <a:solidFill>
-            <a:schemeClr val="bg2"/>
-          </a:solidFill>
-          <a:ln w="12700">
-            <a:solidFill>
-              <a:schemeClr val="bg2"/>
-            </a:solidFill>
-            <a:prstDash val="solid"/>
-          </a:ln>
-        </p:spPr>
-      </p:sp>
-      <p:sp>
-        <p:nvSpPr>
-          <p:cNvPr id="5" name="text-270"/>
-          <p:cNvSpPr txBox="1"/>
-          <p:nvPr/>
-        </p:nvSpPr>
-        <p:spPr>
-          <a:xfrm>
-            <a:off x="822960" y="1874520"/>
-            <a:ext cx="4861408" cy="365760"/>
-          </a:xfrm>
-          <a:prstGeom prst="rect">
-            <a:avLst/>
-          </a:prstGeom>
-          <a:noFill/>
-          <a:ln/>
-        </p:spPr>
-        <p:txBody>
-          <a:bodyPr wrap="square" lIns="0" tIns="0" rIns="0" bIns="0" rtlCol="0" anchor="t"/>
-          <a:lstStyle/>
-          <a:p>
-            <a:pPr indent="0" marL="0">
-              <a:buNone/>
-            </a:pPr>
-            <a:r>
-              <a:rPr lang="en-US" sz="1700" b="1" dirty="0">
-                <a:solidFill>
-                  <a:schemeClr val="tx2"/>
-                </a:solidFill>
-              </a:rPr>
-              <a:t>앱 기능으로 쓰는 AI</a:t>
-            </a:r>
-            <a:endParaRPr lang="en-US" sz="1700" dirty="0"/>
-          </a:p>
-        </p:txBody>
-      </p:sp>
-      <p:sp>
-        <p:nvSpPr>
-          <p:cNvPr id="6" name="text-271"/>
-          <p:cNvSpPr txBox="1"/>
-          <p:nvPr/>
-        </p:nvSpPr>
-        <p:spPr>
-          <a:xfrm>
-            <a:off x="822960" y="2258568"/>
-            <a:ext cx="4861408" cy="320040"/>
-          </a:xfrm>
-          <a:prstGeom prst="rect">
-            <a:avLst/>
-          </a:prstGeom>
-          <a:noFill/>
-          <a:ln/>
-        </p:spPr>
-        <p:txBody>
-          <a:bodyPr wrap="square" lIns="0" tIns="0" rIns="0" bIns="0" rtlCol="0" anchor="t"/>
-          <a:lstStyle/>
-          <a:p>
-            <a:pPr indent="0" marL="0">
-              <a:buNone/>
-            </a:pPr>
-            <a:r>
-              <a:rPr lang="en-US" sz="1300" b="1" dirty="0">
-                <a:solidFill>
-                  <a:schemeClr val="accent3"/>
-                </a:solidFill>
-              </a:rPr>
-              <a:t>Gemini API</a:t>
-            </a:r>
-            <a:endParaRPr lang="en-US" sz="1300" dirty="0"/>
-          </a:p>
-        </p:txBody>
-      </p:sp>
-      <p:sp>
-        <p:nvSpPr>
-          <p:cNvPr id="7" name="text-272"/>
-          <p:cNvSpPr txBox="1"/>
-          <p:nvPr/>
-        </p:nvSpPr>
-        <p:spPr>
-          <a:xfrm>
-            <a:off x="822960" y="2651760"/>
-            <a:ext cx="4861408" cy="1280160"/>
-          </a:xfrm>
-          <a:prstGeom prst="rect">
-            <a:avLst/>
-          </a:prstGeom>
-          <a:noFill/>
-          <a:ln/>
-        </p:spPr>
-        <p:txBody>
-          <a:bodyPr wrap="square" lIns="0" tIns="0" rIns="0" bIns="0" rtlCol="0" anchor="t"/>
-          <a:lstStyle/>
-          <a:p>
-            <a:pPr marL="342900" indent="-342900">
-              <a:spcAft>
-                <a:spcPts val="400"/>
-              </a:spcAft>
-              <a:buSzPct val="100000"/>
-              <a:buChar char="•"/>
-            </a:pPr>
-            <a:r>
-              <a:rPr lang="en-US" sz="1400" dirty="0">
-                <a:solidFill>
-                  <a:schemeClr val="tx1"/>
-                </a:solidFill>
-              </a:rPr>
-              <a:t>안내문 세 줄 요약</a:t>
-            </a:r>
-            <a:endParaRPr lang="en-US" sz="1400" dirty="0"/>
-          </a:p>
-          <a:p>
-            <a:pPr marL="342900" indent="-342900">
-              <a:spcAft>
-                <a:spcPts val="400"/>
-              </a:spcAft>
-              <a:buSzPct val="100000"/>
-              <a:buChar char="•"/>
-            </a:pPr>
-            <a:r>
-              <a:rPr lang="en-US" sz="1400" dirty="0">
-                <a:solidFill>
-                  <a:schemeClr val="tx1"/>
-                </a:solidFill>
-              </a:rPr>
-              <a:t>"이해가 안 돼요" 쉬운 말 재요약</a:t>
-            </a:r>
-            <a:endParaRPr lang="en-US" sz="1400" dirty="0"/>
-          </a:p>
-          <a:p>
-            <a:pPr marL="342900" indent="-342900">
-              <a:spcAft>
-                <a:spcPts val="400"/>
-              </a:spcAft>
-              <a:buSzPct val="100000"/>
-              <a:buChar char="•"/>
-            </a:pPr>
-            <a:r>
-              <a:rPr lang="en-US" sz="1400" dirty="0">
-                <a:solidFill>
-                  <a:schemeClr val="tx1"/>
-                </a:solidFill>
-              </a:rPr>
-              <a:t>규칙 코드 대조를 통과해야 그대로 표시</a:t>
-            </a:r>
-            <a:endParaRPr lang="en-US" sz="1400" dirty="0"/>
-          </a:p>
-        </p:txBody>
-      </p:sp>
-      <p:sp>
-        <p:nvSpPr>
-          <p:cNvPr id="8" name="card-273"/>
-          <p:cNvSpPr/>
-          <p:nvPr/>
-        </p:nvSpPr>
-        <p:spPr>
-          <a:xfrm>
-            <a:off x="6233008" y="1691640"/>
-            <a:ext cx="5410048" cy="2331720"/>
-          </a:xfrm>
-          <a:prstGeom prst="roundRect">
-            <a:avLst>
-              <a:gd name="adj" fmla="val 4706"/>
-            </a:avLst>
-          </a:prstGeom>
-          <a:solidFill>
-            <a:schemeClr val="bg2"/>
-          </a:solidFill>
-          <a:ln w="12700">
-            <a:solidFill>
-              <a:schemeClr val="bg2"/>
-            </a:solidFill>
-            <a:prstDash val="solid"/>
-          </a:ln>
-        </p:spPr>
-      </p:sp>
-      <p:sp>
-        <p:nvSpPr>
-          <p:cNvPr id="9" name="text-274"/>
-          <p:cNvSpPr txBox="1"/>
-          <p:nvPr/>
-        </p:nvSpPr>
-        <p:spPr>
-          <a:xfrm>
-            <a:off x="6507328" y="1874520"/>
-            <a:ext cx="4861408" cy="365760"/>
-          </a:xfrm>
-          <a:prstGeom prst="rect">
-            <a:avLst/>
-          </a:prstGeom>
-          <a:noFill/>
-          <a:ln/>
-        </p:spPr>
-        <p:txBody>
-          <a:bodyPr wrap="square" lIns="0" tIns="0" rIns="0" bIns="0" rtlCol="0" anchor="t"/>
-          <a:lstStyle/>
-          <a:p>
-            <a:pPr indent="0" marL="0">
-              <a:buNone/>
-            </a:pPr>
-            <a:r>
-              <a:rPr lang="en-US" sz="1700" b="1" dirty="0">
-                <a:solidFill>
-                  <a:schemeClr val="tx2"/>
-                </a:solidFill>
-              </a:rPr>
-              <a:t>개발에 쓰는 AI</a:t>
-            </a:r>
-            <a:endParaRPr lang="en-US" sz="1700" dirty="0"/>
-          </a:p>
-        </p:txBody>
-      </p:sp>
-      <p:sp>
-        <p:nvSpPr>
-          <p:cNvPr id="10" name="text-275"/>
-          <p:cNvSpPr txBox="1"/>
-          <p:nvPr/>
-        </p:nvSpPr>
-        <p:spPr>
-          <a:xfrm>
-            <a:off x="6507328" y="2258568"/>
-            <a:ext cx="4861408" cy="320040"/>
-          </a:xfrm>
-          <a:prstGeom prst="rect">
-            <a:avLst/>
-          </a:prstGeom>
-          <a:noFill/>
-          <a:ln/>
-        </p:spPr>
-        <p:txBody>
-          <a:bodyPr wrap="square" lIns="0" tIns="0" rIns="0" bIns="0" rtlCol="0" anchor="t"/>
-          <a:lstStyle/>
-          <a:p>
-            <a:pPr indent="0" marL="0">
-              <a:buNone/>
-            </a:pPr>
-            <a:r>
-              <a:rPr lang="en-US" sz="1300" b="1" dirty="0">
-                <a:solidFill>
-                  <a:schemeClr val="accent3"/>
-                </a:solidFill>
-              </a:rPr>
-              <a:t>Claude (Claude Code) · ChatGPT · Gemini</a:t>
-            </a:r>
-            <a:endParaRPr lang="en-US" sz="1300" dirty="0"/>
-          </a:p>
-        </p:txBody>
-      </p:sp>
-      <p:sp>
-        <p:nvSpPr>
-          <p:cNvPr id="11" name="text-276"/>
-          <p:cNvSpPr txBox="1"/>
-          <p:nvPr/>
-        </p:nvSpPr>
-        <p:spPr>
-          <a:xfrm>
-            <a:off x="6507328" y="2651760"/>
-            <a:ext cx="4861408" cy="1280160"/>
-          </a:xfrm>
-          <a:prstGeom prst="rect">
-            <a:avLst/>
-          </a:prstGeom>
-          <a:noFill/>
-          <a:ln/>
-        </p:spPr>
-        <p:txBody>
-          <a:bodyPr wrap="square" lIns="0" tIns="0" rIns="0" bIns="0" rtlCol="0" anchor="t"/>
-          <a:lstStyle/>
-          <a:p>
-            <a:pPr marL="342900" indent="-342900">
-              <a:spcAft>
-                <a:spcPts val="400"/>
-              </a:spcAft>
-              <a:buSzPct val="100000"/>
-              <a:buChar char="•"/>
-            </a:pPr>
-            <a:r>
-              <a:rPr lang="en-US" sz="1400" dirty="0">
-                <a:solidFill>
-                  <a:schemeClr val="tx1"/>
-                </a:solidFill>
-              </a:rPr>
-              <a:t>유사 서비스 조사, 문서·목업 초안</a:t>
-            </a:r>
-            <a:endParaRPr lang="en-US" sz="1400" dirty="0"/>
-          </a:p>
-          <a:p>
-            <a:pPr marL="342900" indent="-342900">
-              <a:spcAft>
-                <a:spcPts val="400"/>
-              </a:spcAft>
-              <a:buSzPct val="100000"/>
-              <a:buChar char="•"/>
-            </a:pPr>
-            <a:r>
-              <a:rPr lang="en-US" sz="1400" dirty="0">
-                <a:solidFill>
-                  <a:schemeClr val="tx1"/>
-                </a:solidFill>
-              </a:rPr>
-              <a:t>Activity·레이아웃·정규식 코드 초안</a:t>
-            </a:r>
-            <a:endParaRPr lang="en-US" sz="1400" dirty="0"/>
-          </a:p>
-          <a:p>
-            <a:pPr marL="342900" indent="-342900">
-              <a:spcAft>
-                <a:spcPts val="400"/>
-              </a:spcAft>
-              <a:buSzPct val="100000"/>
-              <a:buChar char="•"/>
-            </a:pPr>
-            <a:r>
-              <a:rPr lang="en-US" sz="1400" dirty="0">
-                <a:solidFill>
-                  <a:schemeClr val="tx1"/>
-                </a:solidFill>
-              </a:rPr>
-              <a:t>오류 원인 분석과 디버깅</a:t>
-            </a:r>
-            <a:endParaRPr lang="en-US" sz="1400" dirty="0"/>
-          </a:p>
-        </p:txBody>
-      </p:sp>
-      <p:sp>
-        <p:nvSpPr>
-          <p:cNvPr id="12" name="text-277"/>
-          <p:cNvSpPr txBox="1"/>
-          <p:nvPr/>
-        </p:nvSpPr>
-        <p:spPr>
-          <a:xfrm>
-            <a:off x="548640" y="4251960"/>
-            <a:ext cx="11094415" cy="365760"/>
-          </a:xfrm>
-          <a:prstGeom prst="rect">
-            <a:avLst/>
-          </a:prstGeom>
-          <a:noFill/>
-          <a:ln/>
-        </p:spPr>
-        <p:txBody>
-          <a:bodyPr wrap="square" lIns="0" tIns="0" rIns="0" bIns="0" rtlCol="0" anchor="t"/>
-          <a:lstStyle/>
-          <a:p>
-            <a:pPr indent="0" marL="0">
-              <a:buNone/>
-            </a:pPr>
-            <a:r>
-              <a:rPr lang="en-US" sz="1700" b="1" dirty="0">
-                <a:solidFill>
-                  <a:schemeClr val="tx2"/>
-                </a:solidFill>
-              </a:rPr>
-              <a:t>활용 원칙</a:t>
-            </a:r>
-            <a:endParaRPr lang="en-US" sz="1700" dirty="0"/>
-          </a:p>
-        </p:txBody>
-      </p:sp>
-      <p:sp>
-        <p:nvSpPr>
-          <p:cNvPr id="13" name="card-278"/>
-          <p:cNvSpPr/>
-          <p:nvPr/>
-        </p:nvSpPr>
-        <p:spPr>
-          <a:xfrm>
-            <a:off x="548640" y="4709160"/>
-            <a:ext cx="2602154" cy="1463040"/>
-          </a:xfrm>
-          <a:prstGeom prst="roundRect">
-            <a:avLst>
-              <a:gd name="adj" fmla="val 7500"/>
-            </a:avLst>
-          </a:prstGeom>
-          <a:solidFill>
-            <a:schemeClr val="bg1"/>
-          </a:solidFill>
-          <a:ln w="15875">
-            <a:solidFill>
-              <a:schemeClr val="accent6"/>
-            </a:solidFill>
-            <a:prstDash val="solid"/>
-          </a:ln>
-        </p:spPr>
-      </p:sp>
-      <p:sp>
-        <p:nvSpPr>
-          <p:cNvPr id="14" name="dot-279"/>
-          <p:cNvSpPr/>
-          <p:nvPr/>
-        </p:nvSpPr>
-        <p:spPr>
-          <a:xfrm>
-            <a:off x="731520" y="4892040"/>
-            <a:ext cx="411480" cy="411480"/>
-          </a:xfrm>
-          <a:prstGeom prst="ellipse">
-            <a:avLst/>
-          </a:prstGeom>
-          <a:solidFill>
-            <a:schemeClr val="accent2"/>
-          </a:solidFill>
-          <a:ln w="12700">
-            <a:solidFill>
-              <a:schemeClr val="accent2"/>
-            </a:solidFill>
-            <a:prstDash val="solid"/>
-          </a:ln>
-        </p:spPr>
-      </p:sp>
-      <p:sp>
-        <p:nvSpPr>
-          <p:cNvPr id="15" name="text-280"/>
-          <p:cNvSpPr txBox="1"/>
-          <p:nvPr/>
-        </p:nvSpPr>
-        <p:spPr>
-          <a:xfrm>
-            <a:off x="731520" y="4892040"/>
-            <a:ext cx="411480" cy="411480"/>
-          </a:xfrm>
-          <a:prstGeom prst="rect">
-            <a:avLst/>
-          </a:prstGeom>
-          <a:noFill/>
-          <a:ln/>
-        </p:spPr>
-        <p:txBody>
-          <a:bodyPr wrap="square" lIns="0" tIns="0" rIns="0" bIns="0" rtlCol="0" anchor="ctr"/>
-          <a:lstStyle/>
-          <a:p>
-            <a:pPr algn="ctr" indent="0" marL="0">
-              <a:buNone/>
-            </a:pPr>
-            <a:r>
-              <a:rPr lang="en-US" sz="1400" b="1" dirty="0">
-                <a:solidFill>
-                  <a:schemeClr val="tx1"/>
-                </a:solidFill>
-              </a:rPr>
-              <a:t>1</a:t>
-            </a:r>
-            <a:endParaRPr lang="en-US" sz="1400" dirty="0"/>
-          </a:p>
-        </p:txBody>
-      </p:sp>
-      <p:sp>
-        <p:nvSpPr>
-          <p:cNvPr id="16" name="text-281"/>
-          <p:cNvSpPr txBox="1"/>
-          <p:nvPr/>
-        </p:nvSpPr>
-        <p:spPr>
-          <a:xfrm>
-            <a:off x="731520" y="5394960"/>
-            <a:ext cx="2236394" cy="320040"/>
-          </a:xfrm>
-          <a:prstGeom prst="rect">
-            <a:avLst/>
-          </a:prstGeom>
-          <a:noFill/>
-          <a:ln/>
-        </p:spPr>
-        <p:txBody>
-          <a:bodyPr wrap="square" lIns="0" tIns="0" rIns="0" bIns="0" rtlCol="0" anchor="t"/>
-          <a:lstStyle/>
-          <a:p>
-            <a:pPr indent="0" marL="0">
-              <a:buNone/>
-            </a:pPr>
-            <a:r>
-              <a:rPr lang="en-US" sz="1400" b="1" dirty="0">
-                <a:solidFill>
-                  <a:schemeClr val="tx1"/>
-                </a:solidFill>
-              </a:rPr>
-              <a:t>초안은 AI, 검증은 직접</a:t>
-            </a:r>
-            <a:endParaRPr lang="en-US" sz="1400" dirty="0"/>
-          </a:p>
-        </p:txBody>
-      </p:sp>
-      <p:sp>
-        <p:nvSpPr>
-          <p:cNvPr id="17" name="text-282"/>
-          <p:cNvSpPr txBox="1"/>
-          <p:nvPr/>
-        </p:nvSpPr>
-        <p:spPr>
-          <a:xfrm>
-            <a:off x="731520" y="5715000"/>
-            <a:ext cx="2236394" cy="365760"/>
-          </a:xfrm>
-          <a:prstGeom prst="rect">
-            <a:avLst/>
-          </a:prstGeom>
-          <a:noFill/>
-          <a:ln/>
-        </p:spPr>
-        <p:txBody>
-          <a:bodyPr wrap="square" lIns="0" tIns="0" rIns="0" bIns="0" rtlCol="0" anchor="t"/>
-          <a:lstStyle/>
-          <a:p>
-            <a:pPr indent="0" marL="0">
-              <a:buNone/>
-            </a:pPr>
-            <a:r>
-              <a:rPr lang="en-US" sz="1200" dirty="0">
-                <a:solidFill>
-                  <a:schemeClr val="accent5"/>
-                </a:solidFill>
-              </a:rPr>
-              <a:t>실기기 실행과 단위 테스트 후 반영</a:t>
-            </a:r>
-            <a:endParaRPr lang="en-US" sz="1200" dirty="0"/>
-          </a:p>
-        </p:txBody>
-      </p:sp>
-      <p:sp>
-        <p:nvSpPr>
-          <p:cNvPr id="18" name="card-283"/>
-          <p:cNvSpPr/>
-          <p:nvPr/>
-        </p:nvSpPr>
-        <p:spPr>
-          <a:xfrm>
-            <a:off x="3379394" y="4709160"/>
-            <a:ext cx="2602154" cy="1463040"/>
-          </a:xfrm>
-          <a:prstGeom prst="roundRect">
-            <a:avLst>
-              <a:gd name="adj" fmla="val 7500"/>
-            </a:avLst>
-          </a:prstGeom>
-          <a:solidFill>
-            <a:schemeClr val="bg1"/>
-          </a:solidFill>
-          <a:ln w="15875">
-            <a:solidFill>
-              <a:schemeClr val="accent6"/>
-            </a:solidFill>
-            <a:prstDash val="solid"/>
-          </a:ln>
-        </p:spPr>
-      </p:sp>
-      <p:sp>
-        <p:nvSpPr>
-          <p:cNvPr id="19" name="dot-284"/>
-          <p:cNvSpPr/>
-          <p:nvPr/>
-        </p:nvSpPr>
-        <p:spPr>
-          <a:xfrm>
-            <a:off x="3562274" y="4892040"/>
-            <a:ext cx="411480" cy="411480"/>
-          </a:xfrm>
-          <a:prstGeom prst="ellipse">
-            <a:avLst/>
-          </a:prstGeom>
-          <a:solidFill>
-            <a:schemeClr val="accent2"/>
-          </a:solidFill>
-          <a:ln w="12700">
-            <a:solidFill>
-              <a:schemeClr val="accent2"/>
-            </a:solidFill>
-            <a:prstDash val="solid"/>
-          </a:ln>
-        </p:spPr>
-      </p:sp>
-      <p:sp>
-        <p:nvSpPr>
-          <p:cNvPr id="20" name="text-285"/>
-          <p:cNvSpPr txBox="1"/>
-          <p:nvPr/>
-        </p:nvSpPr>
-        <p:spPr>
-          <a:xfrm>
-            <a:off x="3562274" y="4892040"/>
-            <a:ext cx="411480" cy="411480"/>
-          </a:xfrm>
-          <a:prstGeom prst="rect">
-            <a:avLst/>
-          </a:prstGeom>
-          <a:noFill/>
-          <a:ln/>
-        </p:spPr>
-        <p:txBody>
-          <a:bodyPr wrap="square" lIns="0" tIns="0" rIns="0" bIns="0" rtlCol="0" anchor="ctr"/>
-          <a:lstStyle/>
-          <a:p>
-            <a:pPr algn="ctr" indent="0" marL="0">
-              <a:buNone/>
-            </a:pPr>
-            <a:r>
-              <a:rPr lang="en-US" sz="1400" b="1" dirty="0">
-                <a:solidFill>
-                  <a:schemeClr val="tx1"/>
-                </a:solidFill>
-              </a:rPr>
-              <a:t>2</a:t>
-            </a:r>
-            <a:endParaRPr lang="en-US" sz="1400" dirty="0"/>
-          </a:p>
-        </p:txBody>
-      </p:sp>
-      <p:sp>
-        <p:nvSpPr>
-          <p:cNvPr id="21" name="text-286"/>
-          <p:cNvSpPr txBox="1"/>
-          <p:nvPr/>
-        </p:nvSpPr>
-        <p:spPr>
-          <a:xfrm>
-            <a:off x="3562274" y="5394960"/>
-            <a:ext cx="2236394" cy="320040"/>
-          </a:xfrm>
-          <a:prstGeom prst="rect">
-            <a:avLst/>
-          </a:prstGeom>
-          <a:noFill/>
-          <a:ln/>
-        </p:spPr>
-        <p:txBody>
-          <a:bodyPr wrap="square" lIns="0" tIns="0" rIns="0" bIns="0" rtlCol="0" anchor="t"/>
-          <a:lstStyle/>
-          <a:p>
-            <a:pPr indent="0" marL="0">
-              <a:buNone/>
-            </a:pPr>
-            <a:r>
-              <a:rPr lang="en-US" sz="1400" b="1" dirty="0">
-                <a:solidFill>
-                  <a:schemeClr val="tx1"/>
-                </a:solidFill>
-              </a:rPr>
-              <a:t>정확성은 규칙 코드로</a:t>
-            </a:r>
-            <a:endParaRPr lang="en-US" sz="1400" dirty="0"/>
-          </a:p>
-        </p:txBody>
-      </p:sp>
-      <p:sp>
-        <p:nvSpPr>
-          <p:cNvPr id="22" name="text-287"/>
-          <p:cNvSpPr txBox="1"/>
-          <p:nvPr/>
-        </p:nvSpPr>
-        <p:spPr>
-          <a:xfrm>
-            <a:off x="3562274" y="5715000"/>
-            <a:ext cx="2236394" cy="365760"/>
-          </a:xfrm>
-          <a:prstGeom prst="rect">
-            <a:avLst/>
-          </a:prstGeom>
-          <a:noFill/>
-          <a:ln/>
-        </p:spPr>
-        <p:txBody>
-          <a:bodyPr wrap="square" lIns="0" tIns="0" rIns="0" bIns="0" rtlCol="0" anchor="t"/>
-          <a:lstStyle/>
-          <a:p>
-            <a:pPr indent="0" marL="0">
-              <a:buNone/>
-            </a:pPr>
-            <a:r>
-              <a:rPr lang="en-US" sz="1200" dirty="0">
-                <a:solidFill>
-                  <a:schemeClr val="accent5"/>
-                </a:solidFill>
-              </a:rPr>
-              <a:t>날짜·금액은 정규식으로 대조</a:t>
-            </a:r>
-            <a:endParaRPr lang="en-US" sz="1200" dirty="0"/>
-          </a:p>
-        </p:txBody>
-      </p:sp>
-      <p:sp>
-        <p:nvSpPr>
-          <p:cNvPr id="23" name="card-288"/>
-          <p:cNvSpPr/>
-          <p:nvPr/>
-        </p:nvSpPr>
-        <p:spPr>
-          <a:xfrm>
-            <a:off x="6210148" y="4709160"/>
-            <a:ext cx="2602154" cy="1463040"/>
-          </a:xfrm>
-          <a:prstGeom prst="roundRect">
-            <a:avLst>
-              <a:gd name="adj" fmla="val 7500"/>
-            </a:avLst>
-          </a:prstGeom>
-          <a:solidFill>
-            <a:schemeClr val="bg1"/>
-          </a:solidFill>
-          <a:ln w="15875">
-            <a:solidFill>
-              <a:schemeClr val="accent6"/>
-            </a:solidFill>
-            <a:prstDash val="solid"/>
-          </a:ln>
-        </p:spPr>
-      </p:sp>
-      <p:sp>
-        <p:nvSpPr>
-          <p:cNvPr id="24" name="dot-289"/>
-          <p:cNvSpPr/>
-          <p:nvPr/>
-        </p:nvSpPr>
-        <p:spPr>
-          <a:xfrm>
-            <a:off x="6393028" y="4892040"/>
-            <a:ext cx="411480" cy="411480"/>
-          </a:xfrm>
-          <a:prstGeom prst="ellipse">
-            <a:avLst/>
-          </a:prstGeom>
-          <a:solidFill>
-            <a:schemeClr val="accent2"/>
-          </a:solidFill>
-          <a:ln w="12700">
-            <a:solidFill>
-              <a:schemeClr val="accent2"/>
-            </a:solidFill>
-            <a:prstDash val="solid"/>
-          </a:ln>
-        </p:spPr>
-      </p:sp>
-      <p:sp>
-        <p:nvSpPr>
-          <p:cNvPr id="25" name="text-290"/>
-          <p:cNvSpPr txBox="1"/>
-          <p:nvPr/>
-        </p:nvSpPr>
-        <p:spPr>
-          <a:xfrm>
-            <a:off x="6393028" y="4892040"/>
-            <a:ext cx="411480" cy="411480"/>
-          </a:xfrm>
-          <a:prstGeom prst="rect">
-            <a:avLst/>
-          </a:prstGeom>
-          <a:noFill/>
-          <a:ln/>
-        </p:spPr>
-        <p:txBody>
-          <a:bodyPr wrap="square" lIns="0" tIns="0" rIns="0" bIns="0" rtlCol="0" anchor="ctr"/>
-          <a:lstStyle/>
-          <a:p>
-            <a:pPr algn="ctr" indent="0" marL="0">
-              <a:buNone/>
-            </a:pPr>
-            <a:r>
-              <a:rPr lang="en-US" sz="1400" b="1" dirty="0">
-                <a:solidFill>
-                  <a:schemeClr val="tx1"/>
-                </a:solidFill>
-              </a:rPr>
-              <a:t>3</a:t>
-            </a:r>
-            <a:endParaRPr lang="en-US" sz="1400" dirty="0"/>
-          </a:p>
-        </p:txBody>
-      </p:sp>
-      <p:sp>
-        <p:nvSpPr>
-          <p:cNvPr id="26" name="text-291"/>
-          <p:cNvSpPr txBox="1"/>
-          <p:nvPr/>
-        </p:nvSpPr>
-        <p:spPr>
-          <a:xfrm>
-            <a:off x="6393028" y="5394960"/>
-            <a:ext cx="2236394" cy="320040"/>
-          </a:xfrm>
-          <a:prstGeom prst="rect">
-            <a:avLst/>
-          </a:prstGeom>
-          <a:noFill/>
-          <a:ln/>
-        </p:spPr>
-        <p:txBody>
-          <a:bodyPr wrap="square" lIns="0" tIns="0" rIns="0" bIns="0" rtlCol="0" anchor="t"/>
-          <a:lstStyle/>
-          <a:p>
-            <a:pPr indent="0" marL="0">
-              <a:buNone/>
-            </a:pPr>
-            <a:r>
-              <a:rPr lang="en-US" sz="1400" b="1" dirty="0">
-                <a:solidFill>
-                  <a:schemeClr val="tx1"/>
-                </a:solidFill>
-              </a:rPr>
-              <a:t>개인정보·키는 넘기지 않음</a:t>
-            </a:r>
-            <a:endParaRPr lang="en-US" sz="1400" dirty="0"/>
-          </a:p>
-        </p:txBody>
-      </p:sp>
-      <p:sp>
-        <p:nvSpPr>
-          <p:cNvPr id="27" name="text-292"/>
-          <p:cNvSpPr txBox="1"/>
-          <p:nvPr/>
-        </p:nvSpPr>
-        <p:spPr>
-          <a:xfrm>
-            <a:off x="6393028" y="5715000"/>
-            <a:ext cx="2236394" cy="365760"/>
-          </a:xfrm>
-          <a:prstGeom prst="rect">
-            <a:avLst/>
-          </a:prstGeom>
-          <a:noFill/>
-          <a:ln/>
-        </p:spPr>
-        <p:txBody>
-          <a:bodyPr wrap="square" lIns="0" tIns="0" rIns="0" bIns="0" rtlCol="0" anchor="t"/>
-          <a:lstStyle/>
-          <a:p>
-            <a:pPr indent="0" marL="0">
-              <a:buNone/>
-            </a:pPr>
-            <a:r>
-              <a:rPr lang="en-US" sz="1200" dirty="0">
-                <a:solidFill>
-                  <a:schemeClr val="accent5"/>
-                </a:solidFill>
-              </a:rPr>
-              <a:t>실제 안내문 원본과 API 키 입력 금지</a:t>
-            </a:r>
-            <a:endParaRPr lang="en-US" sz="1200" dirty="0"/>
-          </a:p>
-        </p:txBody>
-      </p:sp>
-      <p:sp>
-        <p:nvSpPr>
-          <p:cNvPr id="28" name="card-293"/>
-          <p:cNvSpPr/>
-          <p:nvPr/>
-        </p:nvSpPr>
-        <p:spPr>
-          <a:xfrm>
-            <a:off x="9040901" y="4709160"/>
-            <a:ext cx="2602154" cy="1463040"/>
-          </a:xfrm>
-          <a:prstGeom prst="roundRect">
-            <a:avLst>
-              <a:gd name="adj" fmla="val 7500"/>
-            </a:avLst>
-          </a:prstGeom>
-          <a:solidFill>
-            <a:schemeClr val="bg1"/>
-          </a:solidFill>
-          <a:ln w="15875">
-            <a:solidFill>
-              <a:schemeClr val="accent6"/>
-            </a:solidFill>
-            <a:prstDash val="solid"/>
-          </a:ln>
-        </p:spPr>
-      </p:sp>
-      <p:sp>
-        <p:nvSpPr>
-          <p:cNvPr id="29" name="dot-294"/>
-          <p:cNvSpPr/>
-          <p:nvPr/>
-        </p:nvSpPr>
-        <p:spPr>
-          <a:xfrm>
-            <a:off x="9223781" y="4892040"/>
-            <a:ext cx="411480" cy="411480"/>
-          </a:xfrm>
-          <a:prstGeom prst="ellipse">
-            <a:avLst/>
-          </a:prstGeom>
-          <a:solidFill>
-            <a:schemeClr val="accent2"/>
-          </a:solidFill>
-          <a:ln w="12700">
-            <a:solidFill>
-              <a:schemeClr val="accent2"/>
-            </a:solidFill>
-            <a:prstDash val="solid"/>
-          </a:ln>
-        </p:spPr>
-      </p:sp>
-      <p:sp>
-        <p:nvSpPr>
-          <p:cNvPr id="30" name="text-295"/>
-          <p:cNvSpPr txBox="1"/>
-          <p:nvPr/>
-        </p:nvSpPr>
-        <p:spPr>
-          <a:xfrm>
-            <a:off x="9223781" y="4892040"/>
-            <a:ext cx="411480" cy="411480"/>
-          </a:xfrm>
-          <a:prstGeom prst="rect">
-            <a:avLst/>
-          </a:prstGeom>
-          <a:noFill/>
-          <a:ln/>
-        </p:spPr>
-        <p:txBody>
-          <a:bodyPr wrap="square" lIns="0" tIns="0" rIns="0" bIns="0" rtlCol="0" anchor="ctr"/>
-          <a:lstStyle/>
-          <a:p>
-            <a:pPr algn="ctr" indent="0" marL="0">
-              <a:buNone/>
-            </a:pPr>
-            <a:r>
-              <a:rPr lang="en-US" sz="1400" b="1" dirty="0">
-                <a:solidFill>
-                  <a:schemeClr val="tx1"/>
-                </a:solidFill>
-              </a:rPr>
-              <a:t>4</a:t>
-            </a:r>
-            <a:endParaRPr lang="en-US" sz="1400" dirty="0"/>
-          </a:p>
-        </p:txBody>
-      </p:sp>
-      <p:sp>
-        <p:nvSpPr>
-          <p:cNvPr id="31" name="text-296"/>
-          <p:cNvSpPr txBox="1"/>
-          <p:nvPr/>
-        </p:nvSpPr>
-        <p:spPr>
-          <a:xfrm>
-            <a:off x="9223781" y="5394960"/>
-            <a:ext cx="2236394" cy="320040"/>
-          </a:xfrm>
-          <a:prstGeom prst="rect">
-            <a:avLst/>
-          </a:prstGeom>
-          <a:noFill/>
-          <a:ln/>
-        </p:spPr>
-        <p:txBody>
-          <a:bodyPr wrap="square" lIns="0" tIns="0" rIns="0" bIns="0" rtlCol="0" anchor="t"/>
-          <a:lstStyle/>
-          <a:p>
-            <a:pPr indent="0" marL="0">
-              <a:buNone/>
-            </a:pPr>
-            <a:r>
-              <a:rPr lang="en-US" sz="1400" b="1" dirty="0">
-                <a:solidFill>
-                  <a:schemeClr val="tx1"/>
-                </a:solidFill>
-              </a:rPr>
-              <a:t>활용 내역 기록</a:t>
-            </a:r>
-            <a:endParaRPr lang="en-US" sz="1400" dirty="0"/>
-          </a:p>
-        </p:txBody>
-      </p:sp>
-      <p:sp>
-        <p:nvSpPr>
-          <p:cNvPr id="32" name="text-297"/>
-          <p:cNvSpPr txBox="1"/>
-          <p:nvPr/>
-        </p:nvSpPr>
-        <p:spPr>
-          <a:xfrm>
-            <a:off x="9223781" y="5715000"/>
-            <a:ext cx="2236394" cy="365760"/>
-          </a:xfrm>
-          <a:prstGeom prst="rect">
-            <a:avLst/>
-          </a:prstGeom>
-          <a:noFill/>
-          <a:ln/>
-        </p:spPr>
-        <p:txBody>
-          <a:bodyPr wrap="square" lIns="0" tIns="0" rIns="0" bIns="0" rtlCol="0" anchor="t"/>
-          <a:lstStyle/>
-          <a:p>
-            <a:pPr indent="0" marL="0">
-              <a:buNone/>
-            </a:pPr>
-            <a:r>
-              <a:rPr lang="en-US" sz="1200" dirty="0">
-                <a:solidFill>
-                  <a:schemeClr val="accent5"/>
-                </a:solidFill>
-              </a:rPr>
-              <a:t>docs/ai-usage.md, 최종 보고서에 요약</a:t>
-            </a:r>
-            <a:endParaRPr lang="en-US" sz="1200" dirty="0"/>
-          </a:p>
-        </p:txBody>
-      </p:sp>
-      <p:sp>
-        <p:nvSpPr>
-          <p:cNvPr id="25" name="Slide Number Placeholder 0"/>
-          <p:cNvSpPr>
-            <a:spLocks noGrp="1"/>
-          </p:cNvSpPr>
-          <p:nvPr>
-            <p:ph type="sldNum" sz="quarter" idx="4294967295"/>
-          </p:nvPr>
-        </p:nvSpPr>
-        <p:spPr>
-          <a:xfrm>
-            <a:off x="11094415" y="6446520"/>
-            <a:ext cx="548640" cy="274320"/>
-          </a:xfrm>
-          <a:prstGeom prst="rect">
-            <a:avLst/>
-          </a:prstGeom>
-          <a:extLst>
-            <a:ext uri="{C572A759-6A51-4108-AA02-DFA0A04FC94B}">
-              <ma14:wrappingTextBoxFlag xmlns:ma14="http://schemas.microsoft.com/office/mac/drawingml/2011/main" val="0"/>
-            </a:ext>
-          </a:extLst>
-        </p:spPr>
-        <p:txBody>
-          <a:bodyPr/>
-          <a:lstStyle>
-            <a:lvl1pPr>
-              <a:defRPr sz="1000">
-                <a:solidFill>
-                  <a:schemeClr val="accent5"/>
-                </a:solidFill>
-              </a:defRPr>
-            </a:lvl1pPr>
-          </a:lstStyle>
-          <a:p>
-            <a:pPr algn="r"/>
-            <a:fld id="{F7021451-1387-4CA6-816F-3879F97B5CBC}" type="slidenum">
-              <a:rPr b="0" lang="en-US"/>
-              <a:t>16</a:t>
-            </a:fld>
-            <a:endParaRPr lang="en-US"/>
-          </a:p>
-        </p:txBody>
-      </p:sp>
-    </p:spTree>
-  </p:cSld>
-  <p:clrMapOvr>
-    <a:masterClrMapping/>
-  </p:clrMapOvr>
-</p:sld>
-</file>
-
-<file path=ppt/slides/slide17.xml><?xml version="1.0" encoding="utf-8"?>
-<p:sld xmlns:a="http://schemas.openxmlformats.org/drawingml/2006/main" xmlns:r="http://schemas.openxmlformats.org/officeDocument/2006/relationships" xmlns:p="http://schemas.openxmlformats.org/presentationml/2006/main">
-  <p:cSld name="Slide 17">
-    <p:spTree>
-      <p:nvGrpSpPr>
-        <p:cNvPr id="1" name=""/>
-        <p:cNvGrpSpPr/>
-        <p:nvPr/>
-      </p:nvGrpSpPr>
-      <p:grpSpPr>
-        <a:xfrm>
-          <a:off x="0" y="0"/>
-          <a:ext cx="0" cy="0"/>
-          <a:chOff x="0" y="0"/>
-          <a:chExt cx="0" cy="0"/>
-        </a:xfrm>
-      </p:grpSpPr>
-      <p:sp>
-        <p:nvSpPr>
-          <p:cNvPr id="2" name="Text 0"/>
-          <p:cNvSpPr/>
-          <p:nvPr>
-            <p:ph idx="100" type="title" hasCustomPrompt="1"/>
-          </p:nvPr>
-        </p:nvSpPr>
-        <p:spPr>
-          <a:xfrm>
-            <a:off x="548640" y="320040"/>
-            <a:ext cx="11094415" cy="731520"/>
-          </a:xfrm>
-          <a:prstGeom prst="rect">
-            <a:avLst/>
-          </a:prstGeom>
-          <a:noFill/>
-          <a:ln/>
-        </p:spPr>
-        <p:txBody>
-          <a:bodyPr wrap="square" lIns="0" tIns="0" rIns="0" bIns="0" rtlCol="0" anchor="ctr"/>
-          <a:lstStyle/>
-          <a:p>
-            <a:pPr algn="l" indent="0" marL="0">
-              <a:buNone/>
-            </a:pPr>
-            <a:r>
-              <a:rPr lang="en-US" sz="3200" b="1" dirty="0">
-                <a:solidFill>
-                  <a:schemeClr val="tx2"/>
-                </a:solidFill>
-              </a:rPr>
-              <a:t>예상 문제와 대응 방안</a:t>
-            </a:r>
-            <a:endParaRPr lang="en-US" sz="3200" dirty="0"/>
-          </a:p>
-        </p:txBody>
-      </p:sp>
-      <p:sp>
-        <p:nvSpPr>
-          <p:cNvPr id="3" name="text-298"/>
-          <p:cNvSpPr txBox="1"/>
-          <p:nvPr/>
-        </p:nvSpPr>
-        <p:spPr>
-          <a:xfrm>
-            <a:off x="548640" y="1051560"/>
-            <a:ext cx="11094415" cy="594360"/>
-          </a:xfrm>
-          <a:prstGeom prst="rect">
-            <a:avLst/>
-          </a:prstGeom>
-          <a:noFill/>
-          <a:ln/>
-        </p:spPr>
-        <p:txBody>
-          <a:bodyPr wrap="square" lIns="0" tIns="0" rIns="0" bIns="0" rtlCol="0" anchor="t"/>
-          <a:lstStyle/>
-          <a:p>
-            <a:pPr indent="0" marL="0">
-              <a:buNone/>
-            </a:pPr>
-            <a:r>
-              <a:rPr lang="en-US" sz="1600" dirty="0">
-                <a:solidFill>
-                  <a:schemeClr val="accent5"/>
-                </a:solidFill>
-              </a:rPr>
               <a:t>실패할 수 있는 지점마다 앱이 멈추지 않고 사용자가 원문으로 돌아갈 수 있는 경로를 둔다</a:t>
             </a:r>
             <a:endParaRPr lang="en-US" sz="1600" dirty="0"/>
@@ -12062,7 +10735,7 @@
       </p:sp>
       <p:graphicFrame>
         <p:nvGraphicFramePr>
-          <p:cNvPr id="18" name="table-299"/>
+          <p:cNvPr id="17" name="table-271"/>
           <p:cNvGraphicFramePr>
             <a:graphicFrameLocks noGrp="1"/>
           </p:cNvGraphicFramePr>
@@ -13191,7 +11864,7 @@
             <a:pPr algn="r"/>
             <a:fld id="{F7021451-1387-4CA6-816F-3879F97B5CBC}" type="slidenum">
               <a:rPr b="0" lang="en-US"/>
-              <a:t>17</a:t>
+              <a:t>16</a:t>
             </a:fld>
             <a:endParaRPr lang="en-US"/>
           </a:p>
@@ -13205,9 +11878,9 @@
 </p:sld>
 </file>
 
-<file path=ppt/slides/slide18.xml><?xml version="1.0" encoding="utf-8"?>
+<file path=ppt/slides/slide17.xml><?xml version="1.0" encoding="utf-8"?>
 <p:sld xmlns:a="http://schemas.openxmlformats.org/drawingml/2006/main" xmlns:r="http://schemas.openxmlformats.org/officeDocument/2006/relationships" xmlns:p="http://schemas.openxmlformats.org/presentationml/2006/main">
-  <p:cSld name="Slide 18">
+  <p:cSld name="Slide 17">
     <p:spTree>
       <p:nvGrpSpPr>
         <p:cNvPr id="1" name=""/>
@@ -13224,7 +11897,7 @@
       </p:grpSpPr>
       <p:sp>
         <p:nvSpPr>
-          <p:cNvPr id="2" name="text-300"/>
+          <p:cNvPr id="2" name="text-272"/>
           <p:cNvSpPr txBox="1"/>
           <p:nvPr/>
         </p:nvSpPr>
@@ -13260,7 +11933,7 @@
       </p:sp>
       <p:sp>
         <p:nvSpPr>
-          <p:cNvPr id="3" name="text-301"/>
+          <p:cNvPr id="3" name="text-273"/>
           <p:cNvSpPr txBox="1"/>
           <p:nvPr/>
         </p:nvSpPr>
@@ -13296,7 +11969,7 @@
       </p:sp>
       <p:sp>
         <p:nvSpPr>
-          <p:cNvPr id="4" name="card-302"/>
+          <p:cNvPr id="4" name="card-274"/>
           <p:cNvSpPr/>
           <p:nvPr/>
         </p:nvSpPr>
@@ -13323,7 +11996,7 @@
       </p:sp>
       <p:sp>
         <p:nvSpPr>
-          <p:cNvPr id="5" name="dot-303"/>
+          <p:cNvPr id="5" name="dot-275"/>
           <p:cNvSpPr/>
           <p:nvPr/>
         </p:nvSpPr>
@@ -13348,7 +12021,7 @@
       </p:sp>
       <p:sp>
         <p:nvSpPr>
-          <p:cNvPr id="6" name="text-304"/>
+          <p:cNvPr id="6" name="text-276"/>
           <p:cNvSpPr txBox="1"/>
           <p:nvPr/>
         </p:nvSpPr>
@@ -13384,7 +12057,7 @@
       </p:sp>
       <p:sp>
         <p:nvSpPr>
-          <p:cNvPr id="7" name="text-305"/>
+          <p:cNvPr id="7" name="text-277"/>
           <p:cNvSpPr txBox="1"/>
           <p:nvPr/>
         </p:nvSpPr>
@@ -13420,7 +12093,7 @@
       </p:sp>
       <p:sp>
         <p:nvSpPr>
-          <p:cNvPr id="8" name="text-306"/>
+          <p:cNvPr id="8" name="text-278"/>
           <p:cNvSpPr txBox="1"/>
           <p:nvPr/>
         </p:nvSpPr>
@@ -13456,7 +12129,7 @@
       </p:sp>
       <p:sp>
         <p:nvSpPr>
-          <p:cNvPr id="9" name="card-307"/>
+          <p:cNvPr id="9" name="card-279"/>
           <p:cNvSpPr/>
           <p:nvPr/>
         </p:nvSpPr>
@@ -13483,7 +12156,7 @@
       </p:sp>
       <p:sp>
         <p:nvSpPr>
-          <p:cNvPr id="10" name="dot-308"/>
+          <p:cNvPr id="10" name="dot-280"/>
           <p:cNvSpPr/>
           <p:nvPr/>
         </p:nvSpPr>
@@ -13508,7 +12181,7 @@
       </p:sp>
       <p:sp>
         <p:nvSpPr>
-          <p:cNvPr id="11" name="text-309"/>
+          <p:cNvPr id="11" name="text-281"/>
           <p:cNvSpPr txBox="1"/>
           <p:nvPr/>
         </p:nvSpPr>
@@ -13544,7 +12217,7 @@
       </p:sp>
       <p:sp>
         <p:nvSpPr>
-          <p:cNvPr id="12" name="text-310"/>
+          <p:cNvPr id="12" name="text-282"/>
           <p:cNvSpPr txBox="1"/>
           <p:nvPr/>
         </p:nvSpPr>
@@ -13580,7 +12253,7 @@
       </p:sp>
       <p:sp>
         <p:nvSpPr>
-          <p:cNvPr id="13" name="text-311"/>
+          <p:cNvPr id="13" name="text-283"/>
           <p:cNvSpPr txBox="1"/>
           <p:nvPr/>
         </p:nvSpPr>
@@ -13616,7 +12289,7 @@
       </p:sp>
       <p:sp>
         <p:nvSpPr>
-          <p:cNvPr id="14" name="card-312"/>
+          <p:cNvPr id="14" name="card-284"/>
           <p:cNvSpPr/>
           <p:nvPr/>
         </p:nvSpPr>
@@ -13643,7 +12316,7 @@
       </p:sp>
       <p:sp>
         <p:nvSpPr>
-          <p:cNvPr id="15" name="dot-313"/>
+          <p:cNvPr id="15" name="dot-285"/>
           <p:cNvSpPr/>
           <p:nvPr/>
         </p:nvSpPr>
@@ -13668,7 +12341,7 @@
       </p:sp>
       <p:sp>
         <p:nvSpPr>
-          <p:cNvPr id="16" name="text-314"/>
+          <p:cNvPr id="16" name="text-286"/>
           <p:cNvSpPr txBox="1"/>
           <p:nvPr/>
         </p:nvSpPr>
@@ -13704,7 +12377,7 @@
       </p:sp>
       <p:sp>
         <p:nvSpPr>
-          <p:cNvPr id="17" name="text-315"/>
+          <p:cNvPr id="17" name="text-287"/>
           <p:cNvSpPr txBox="1"/>
           <p:nvPr/>
         </p:nvSpPr>
@@ -13740,7 +12413,7 @@
       </p:sp>
       <p:sp>
         <p:nvSpPr>
-          <p:cNvPr id="18" name="text-316"/>
+          <p:cNvPr id="18" name="text-288"/>
           <p:cNvSpPr txBox="1"/>
           <p:nvPr/>
         </p:nvSpPr>
@@ -13776,7 +12449,7 @@
       </p:sp>
       <p:sp>
         <p:nvSpPr>
-          <p:cNvPr id="19" name="text-317"/>
+          <p:cNvPr id="19" name="text-289"/>
           <p:cNvSpPr txBox="1"/>
           <p:nvPr/>
         </p:nvSpPr>
@@ -13823,7 +12496,7 @@
       </p:sp>
       <p:sp>
         <p:nvSpPr>
-          <p:cNvPr id="20" name="text-318"/>
+          <p:cNvPr id="20" name="text-290"/>
           <p:cNvSpPr txBox="1"/>
           <p:nvPr/>
         </p:nvSpPr>
